--- a/en/slides/11-Computer_Architecture-Combinational_Machines.pptx
+++ b/en/slides/11-Computer_Architecture-Combinational_Machines.pptx
@@ -126,26 +126,26 @@
   <p:extLst>
     <p:ext uri="{521415D9-36F7-43E2-AB2F-B90AF26B5E84}">
       <p14:sectionLst xmlns:p14="http://schemas.microsoft.com/office/powerpoint/2010/main">
-        <p14:section name="Opening" id="{0e5aed73-e995-f1b4-173c-c143d25445b9}">
+        <p14:section name="Opening" id="{deadb0f7-2789-0e65-5f87-625c1e09f4ab}">
           <p14:sldIdLst>
             <p14:sldId id="256"/>
             <p14:sldId id="257"/>
           </p14:sldIdLst>
         </p14:section>
-        <p14:section name="Combinational machines" id="{ca012d8a-d392-7cc5-00ac-d3a32ed8b4ab}">
+        <p14:section name="Combinational machines" id="{8f2ecb0e-b94d-f695-87fc-12c3c3ac9fd2}">
           <p14:sldIdLst>
             <p14:sldId id="258"/>
             <p14:sldId id="259"/>
           </p14:sldIdLst>
         </p14:section>
-        <p14:section name="Codes" id="{7ed23e3a-5087-8484-b306-d8c64adb9934}">
+        <p14:section name="Codes" id="{59013832-d39f-9f17-7536-bef61302ea4f}">
           <p14:sldIdLst>
             <p14:sldId id="260"/>
             <p14:sldId id="261"/>
             <p14:sldId id="262"/>
           </p14:sldIdLst>
         </p14:section>
-        <p14:section name="Decoders and encoders" id="{6c904f0c-6a75-b3cb-a7df-206c702ee100}">
+        <p14:section name="Decoders and encoders" id="{1f9f1755-cfdd-2510-4581-c93a23588ad7}">
           <p14:sldIdLst>
             <p14:sldId id="263"/>
             <p14:sldId id="264"/>
@@ -153,19 +153,19 @@
             <p14:sldId id="266"/>
           </p14:sldIdLst>
         </p14:section>
-        <p14:section name="Multiplexers and demultiplexers" id="{ebfc2a28-8263-c60b-1ea1-bc2e773d2840}">
+        <p14:section name="Multiplexers and demultiplexers" id="{d5ebbe4a-392b-9f39-09a5-bc8972a35f48}">
           <p14:sldIdLst>
             <p14:sldId id="267"/>
             <p14:sldId id="268"/>
           </p14:sldIdLst>
         </p14:section>
-        <p14:section name="Comparing and checking" id="{e4ee41a8-c11a-4a39-ff4c-2f04e587ee58}">
+        <p14:section name="Comparing and checking" id="{949d2b1b-6747-87bd-6485-2bfd3f299ab4}">
           <p14:sldIdLst>
             <p14:sldId id="269"/>
             <p14:sldId id="270"/>
           </p14:sldIdLst>
         </p14:section>
-        <p14:section name="The arithmetic logic unit" id="{58092dbe-3cae-299e-3ac9-821fcca3bb71}">
+        <p14:section name="The arithmetic logic unit" id="{274f4567-4ce9-67ef-428d-4372ff9274a4}">
           <p14:sldIdLst>
             <p14:sldId id="271"/>
             <p14:sldId id="272"/>
@@ -1560,7 +1560,7 @@
           <a:p>
             <a:r>
               <a:rPr lang="en-US" dirty="0"/>
-              <a:t>Six objectives. Tell a combinational machine from a sequential one. Compute how many bits a code needs and recognise incomplete and redundant codes. Design a decoder and an encoder, and compose small decoders into larger ones. Explain multiplexers and demultiplexers and build them from gates. Build a comparator and a parity network, knowing what a parity check can and cannot detect. And point to each of these machines inside the processor.</a:t>
+              <a:t>Six objectives. Tell a combinational machine from a sequential one. Compute how many bits a code needs and recognise incomplete and redundant codes. Design a decoder and an encoder, and say what a transcoder does. Explain multiplexers and demultiplexers and build them from gates. Build a comparator and a parity network, knowing what a parity check can and cannot detect. And point to each of these machines inside the processor.</a:t>
             </a:r>
             <a:endParaRPr lang="en-US" dirty="0"/>
           </a:p>
@@ -1648,7 +1648,7 @@
           <a:p>
             <a:r>
               <a:rPr lang="en-US" dirty="0"/>
-              <a:t>Five conclusions. Information is an attribute, a type and a value, and a code writes the value as a string. A fixed-length binary code needs the logarithm of N bits, rounded up; a redundant code spends more to detect errors. Encoding, decoding and transcoding are done by combinational machines. Multiplexers select a source, demultiplexers a destination, comparators and parity networks check. And the processor uses all of them. What these machines lack is memory: after Part 2 of Verm1, Lecture 13 adds it.
+              <a:t>Five conclusions. A code writes each element of a set as a string of symbols over an alphabet, its code word. A fixed-length binary code needs the logarithm of N bits, rounded up; a redundant code spends more to detect errors. Encoding, decoding and transcoding are done by combinational machines. Multiplexers select a source, demultiplexers a destination, comparators and parity networks check. And the processor uses all of them. What these machines lack is memory: after Part 2 of Verm1, Lecture 13 adds it.
 For the lecturer: Next: Verm1, part 2: steering and food. Then sequential machines: what is missing here is memory.</a:t>
             </a:r>
             <a:endParaRPr lang="en-US" dirty="0"/>
@@ -3302,7 +3302,63 @@
       </p:sp>
       <p:sp>
         <p:nvSpPr>
-          <p:cNvPr id="12" name="Shape 10"/>
+          <p:cNvPr id="12" name="Text 10"/>
+          <p:cNvSpPr txBox="1"/>
+          <p:nvPr/>
+        </p:nvSpPr>
+        <p:spPr>
+          <a:xfrm>
+            <a:off x="4693615" y="566928"/>
+            <a:ext cx="6949440" cy="640080"/>
+          </a:xfrm>
+          <a:prstGeom prst="rect">
+            <a:avLst/>
+          </a:prstGeom>
+          <a:noFill/>
+          <a:ln/>
+        </p:spPr>
+        <p:txBody>
+          <a:bodyPr wrap="square" lIns="0" tIns="0" rIns="0" bIns="0" rtlCol="0" anchor="t"/>
+          <a:lstStyle/>
+          <a:p>
+            <a:pPr algn="r" indent="0" marL="0">
+              <a:buNone/>
+            </a:pPr>
+            <a:r>
+              <a:rPr lang="en-US" sz="1300" dirty="0">
+                <a:solidFill>
+                  <a:srgbClr val="CFE3EA"/>
+                </a:solidFill>
+                <a:latin typeface="Calibri" pitchFamily="34" charset="0"/>
+                <a:ea typeface="Calibri" pitchFamily="34" charset="-122"/>
+                <a:cs typeface="Calibri" pitchFamily="34" charset="-120"/>
+              </a:rPr>
+              <a:t>Lecture deck. The listings, the complete program and how to test it are in the code deck:</a:t>
+            </a:r>
+            <a:endParaRPr lang="en-US" sz="1300" dirty="0"/>
+          </a:p>
+          <a:p>
+            <a:pPr algn="r" indent="0" marL="0">
+              <a:buNone/>
+            </a:pPr>
+            <a:r>
+              <a:rPr lang="en-US" sz="1300" dirty="0">
+                <a:solidFill>
+                  <a:srgbClr val="CFE3EA"/>
+                </a:solidFill>
+                <a:latin typeface="Calibri" pitchFamily="34" charset="0"/>
+                <a:ea typeface="Calibri" pitchFamily="34" charset="-122"/>
+                <a:cs typeface="Calibri" pitchFamily="34" charset="-120"/>
+              </a:rPr>
+              <a:t>11-Computer_Architecture-Combinational_Machines-Code.pptx</a:t>
+            </a:r>
+            <a:endParaRPr lang="en-US" sz="1300" dirty="0"/>
+          </a:p>
+        </p:txBody>
+      </p:sp>
+      <p:sp>
+        <p:nvSpPr>
+          <p:cNvPr id="13" name="Shape 11"/>
           <p:cNvSpPr/>
           <p:nvPr/>
         </p:nvSpPr>
@@ -3329,7 +3385,7 @@
       </p:sp>
       <p:pic>
         <p:nvPicPr>
-          <p:cNvPr id="13" name="Image 0" descr="/Users/raffaelemontella/devel/riscv-prg32/computer-architecture-with-prg32/tools/assets/game_breakout.png">    </p:cNvPr>
+          <p:cNvPr id="14" name="Image 0" descr="/Users/raffaelemontella/devel/riscv-prg32/computer-architecture-with-prg32/tools/assets/game_breakout.png">    </p:cNvPr>
           <p:cNvPicPr>
             <a:picLocks noChangeAspect="1"/>
           </p:cNvPicPr>
@@ -20949,7 +21005,7 @@
         </p:nvSpPr>
         <p:spPr>
           <a:xfrm>
-            <a:off x="548640" y="2104542"/>
+            <a:off x="548640" y="2153107"/>
             <a:ext cx="402336" cy="402336"/>
           </a:xfrm>
           <a:prstGeom prst="roundRect">
@@ -20996,7 +21052,7 @@
         </p:nvSpPr>
         <p:spPr>
           <a:xfrm>
-            <a:off x="1207008" y="2086254"/>
+            <a:off x="1207008" y="2134819"/>
             <a:ext cx="10436047" cy="681736"/>
           </a:xfrm>
           <a:prstGeom prst="rect">
@@ -21038,7 +21094,7 @@
         </p:nvSpPr>
         <p:spPr>
           <a:xfrm>
-            <a:off x="548640" y="3016301"/>
+            <a:off x="548640" y="3113430"/>
             <a:ext cx="402336" cy="402336"/>
           </a:xfrm>
           <a:prstGeom prst="roundRect">
@@ -21085,8 +21141,8 @@
         </p:nvSpPr>
         <p:spPr>
           <a:xfrm>
-            <a:off x="1207008" y="2998013"/>
-            <a:ext cx="10436047" cy="681736"/>
+            <a:off x="1207008" y="3095142"/>
+            <a:ext cx="10436047" cy="438912"/>
           </a:xfrm>
           <a:prstGeom prst="rect">
             <a:avLst/>
@@ -21095,7 +21151,7 @@
           <a:ln/>
         </p:spPr>
         <p:txBody>
-          <a:bodyPr wrap="square" lIns="0" tIns="0" rIns="0" bIns="0" rtlCol="0" anchor="t"/>
+          <a:bodyPr wrap="square" lIns="0" tIns="0" rIns="0" bIns="0" rtlCol="0" anchor="ctr"/>
           <a:lstStyle/>
           <a:p>
             <a:pPr indent="0" marL="0">
@@ -21113,7 +21169,7 @@
                 <a:ea typeface="Calibri" pitchFamily="34" charset="-122"/>
                 <a:cs typeface="Calibri" pitchFamily="34" charset="-120"/>
               </a:rPr>
-              <a:t>Design a decoder and an encoder, and compose small decoders into larger ones</a:t>
+              <a:t>Design a decoder and an encoder, and say what a transcoder does</a:t>
             </a:r>
             <a:endParaRPr lang="en-US" sz="2200" dirty="0"/>
           </a:p>
@@ -21127,7 +21183,7 @@
         </p:nvSpPr>
         <p:spPr>
           <a:xfrm>
-            <a:off x="548640" y="3928059"/>
+            <a:off x="548640" y="3830930"/>
             <a:ext cx="402336" cy="402336"/>
           </a:xfrm>
           <a:prstGeom prst="roundRect">
@@ -21174,7 +21230,7 @@
         </p:nvSpPr>
         <p:spPr>
           <a:xfrm>
-            <a:off x="1207008" y="3909771"/>
+            <a:off x="1207008" y="3812642"/>
             <a:ext cx="10436047" cy="681736"/>
           </a:xfrm>
           <a:prstGeom prst="rect">
@@ -21216,7 +21272,7 @@
         </p:nvSpPr>
         <p:spPr>
           <a:xfrm>
-            <a:off x="548640" y="4839818"/>
+            <a:off x="548640" y="4791253"/>
             <a:ext cx="402336" cy="402336"/>
           </a:xfrm>
           <a:prstGeom prst="roundRect">
@@ -21263,7 +21319,7 @@
         </p:nvSpPr>
         <p:spPr>
           <a:xfrm>
-            <a:off x="1207008" y="4821530"/>
+            <a:off x="1207008" y="4772965"/>
             <a:ext cx="10436047" cy="681736"/>
           </a:xfrm>
           <a:prstGeom prst="rect">
@@ -21561,7 +21617,7 @@
                 <a:ea typeface="Calibri" pitchFamily="34" charset="-122"/>
                 <a:cs typeface="Calibri" pitchFamily="34" charset="-120"/>
               </a:rPr>
-              <a:t>Information is an attribute, a type and a value; a code writes the value as a string over an alphabet</a:t>
+              <a:t>A code writes each element of a set as a string of symbols over an alphabet: its code word</a:t>
             </a:r>
             <a:endParaRPr lang="en-US" sz="1900" dirty="0"/>
           </a:p>

--- a/en/slides/11-Computer_Architecture-Combinational_Machines.pptx
+++ b/en/slides/11-Computer_Architecture-Combinational_Machines.pptx
@@ -126,26 +126,26 @@
   <p:extLst>
     <p:ext uri="{521415D9-36F7-43E2-AB2F-B90AF26B5E84}">
       <p14:sectionLst xmlns:p14="http://schemas.microsoft.com/office/powerpoint/2010/main">
-        <p14:section name="Opening" id="{deadb0f7-2789-0e65-5f87-625c1e09f4ab}">
+        <p14:section name="Opening" id="{eec624d0-4727-02b3-e145-dc5dcd61dfa0}">
           <p14:sldIdLst>
             <p14:sldId id="256"/>
             <p14:sldId id="257"/>
           </p14:sldIdLst>
         </p14:section>
-        <p14:section name="Combinational machines" id="{8f2ecb0e-b94d-f695-87fc-12c3c3ac9fd2}">
+        <p14:section name="Combinational machines" id="{2d369b06-f56e-3b7f-eba9-fc97aa277a37}">
           <p14:sldIdLst>
             <p14:sldId id="258"/>
             <p14:sldId id="259"/>
           </p14:sldIdLst>
         </p14:section>
-        <p14:section name="Codes" id="{59013832-d39f-9f17-7536-bef61302ea4f}">
+        <p14:section name="Codes" id="{9dffc9a1-01b7-dfc7-502c-d971cdb3c5f9}">
           <p14:sldIdLst>
             <p14:sldId id="260"/>
             <p14:sldId id="261"/>
             <p14:sldId id="262"/>
           </p14:sldIdLst>
         </p14:section>
-        <p14:section name="Decoders and encoders" id="{1f9f1755-cfdd-2510-4581-c93a23588ad7}">
+        <p14:section name="Decoders and encoders" id="{f922f783-5662-fdb7-c0de-1ed51751b228}">
           <p14:sldIdLst>
             <p14:sldId id="263"/>
             <p14:sldId id="264"/>
@@ -153,19 +153,19 @@
             <p14:sldId id="266"/>
           </p14:sldIdLst>
         </p14:section>
-        <p14:section name="Multiplexers and demultiplexers" id="{d5ebbe4a-392b-9f39-09a5-bc8972a35f48}">
+        <p14:section name="Multiplexers and demultiplexers" id="{1c75144b-a95d-44ac-67b7-81a144a7115e}">
           <p14:sldIdLst>
             <p14:sldId id="267"/>
             <p14:sldId id="268"/>
           </p14:sldIdLst>
         </p14:section>
-        <p14:section name="Comparing and checking" id="{949d2b1b-6747-87bd-6485-2bfd3f299ab4}">
+        <p14:section name="Comparing and checking" id="{10f04a49-f05a-2996-6a81-0ea53b798af3}">
           <p14:sldIdLst>
             <p14:sldId id="269"/>
             <p14:sldId id="270"/>
           </p14:sldIdLst>
         </p14:section>
-        <p14:section name="The arithmetic logic unit" id="{274f4567-4ce9-67ef-428d-4372ff9274a4}">
+        <p14:section name="The arithmetic logic unit" id="{e23a7708-73d7-ba06-e2c4-431856bc9173}">
           <p14:sldIdLst>
             <p14:sldId id="271"/>
             <p14:sldId id="272"/>
@@ -579,6 +579,8 @@
             <a:r>
               <a:rPr lang="en-US" dirty="0"/>
               <a:t>The previous lectures gave you gates and a method to combine them. This one is a catalogue of the machines that designers actually use: decoders, encoders, multiplexers, comparators, parity networks, and finally the arithmetic logic unit. For each you learn what it does, how it is built, and where it sits inside a RISC-V processor. The young Turing of the quotation wants his carrots and peas kept apart: this lecture is about keeping things separate, and choosing among them.
+Learning status: UNDERSTAND NOW, by the end of this lecture you explain it, trace it and apply it on your own; USE NOW, you follow and use the recipe today; how it works inside is explained later, or is not part of the course; UNDERSTAND LATER, recognise the name and what it is for; a later lecture explains it. A slide without a badge is context: a story, an example, a question, an exercise.
+Learning status of this lecture. UNDERSTAND NOW: multiplexers; combinational machines; codes; decoders and encoders; comparators and parity; the ALU. USE NOW: the complete program, the PRG32 tools (used, not studied, in this course). UNDERSTAND LATER: finite-state machines (Lecture 13). A slide without a badge is context: a story, an example, a question, an exercise.
 For the lecturer: The quotation is translated back from the Italian version used in the original deck. Spiral: a table lookup in assembly is a multiplexer; the lecture then builds the standard combinational blocks and shows where each one sits inside a RISC-V processor (the old course used the Motorola 68000 as reference).</a:t>
             </a:r>
             <a:endParaRPr lang="en-US" dirty="0"/>
@@ -668,6 +670,7 @@
             <a:r>
               <a:rPr lang="en-US" dirty="0"/>
               <a:t>The encoder is the inverse machine: it receives N lines, of which one is active, and produces its number as a code word of m bits. Each output bit is the OR of the input lines whose number has a 1 in that position. If more than one line can be active at the same time a priority encoder is needed, which outputs the number of the most important active line. You will meet it again with interrupts, when several devices ask for attention at once.
+UNDERSTAND NOW: decoders and encoders.
 For the lecturer: Codificatore. For N = 4: C0 = U1 + U3, C1 = U2 + U3. Priority encoders appear again with interrupts: several devices ask for attention, one number reaches the processor.</a:t>
             </a:r>
             <a:endParaRPr lang="en-US" dirty="0"/>
@@ -757,6 +760,7 @@
             <a:r>
               <a:rPr lang="en-US" dirty="0"/>
               <a:t>A transcoder converts a word of one code into the corresponding word of another code. The example is the display with seven segments: the input is a BCD digit, the outputs are the seven lines that light the segments, named from a to g. The table gives, for each digit, which segments are lit: the digit 2 lights a, b, g, e and d. There are seven outputs, so seven functions of four variables to synthesise, each with six don't-cares.
+UNDERSTAND NOW: decoders and encoders.
 For the lecturer: Transcodificatore BCD - display a 7 segmenti. Each segment is an LED switched by a digital signal. The six unused BCD words are don't-cares for all seven functions.</a:t>
             </a:r>
             <a:endParaRPr lang="en-US" dirty="0"/>
@@ -846,6 +850,7 @@
             <a:r>
               <a:rPr lang="en-US" dirty="0"/>
               <a:t>A multiplexer has 2 to the n data inputs, n selection lines and one output: it transfers to the output the input chosen by the selection lines. The formula shows how: each data input is multiplied by one minterm of the selection lines, and the products are added. With two inputs, Y = S'I0 + S I1: when S is 0 the first term passes I0, when S is 1 the second passes I1. The drawing is exactly this formula in gates. It is the machine of the warm-up.
+UNDERSTAND NOW: multiplexers.
 For the lecturer: Multiplexer indirizzabile: a MUXL (one enable line per input) plus a decoder. A multiplexer also implements any function of its selection variables: put the truth table on the data inputs.</a:t>
             </a:r>
             <a:endParaRPr lang="en-US" dirty="0"/>
@@ -935,6 +940,7 @@
             <a:r>
               <a:rPr lang="en-US" dirty="0"/>
               <a:t>The demultiplexer is the inverse: one data input, n selection lines and 2 to the n outputs. The input is routed to the output chosen by the selection lines, and the other outputs stay at 0. With the data input fixed at 1 it is exactly a decoder. A multiplexer at one end of a wire and a demultiplexer at the other let many signals share that wire, one at a time: the idea behind every shared line, including the buses of Lecture 14.
+UNDERSTAND NOW: multiplexers.
 For the lecturer: Demultiplexer indirizzabile: Fi = D . Ui, where Ui are the outputs of the decoder.</a:t>
             </a:r>
             <a:endParaRPr lang="en-US" dirty="0"/>
@@ -1024,6 +1030,7 @@
             <a:r>
               <a:rPr lang="en-US" dirty="0"/>
               <a:t>A comparator receives two words and produces one bit, 1 when they are equal. Two bits are equal when their XNOR is 1; two words are equal when all their pairs of bits are equal, so the comparator is an AND of XNORs. The drawing shows it for words of two bits. In the processor it decides the branches beq and bne: the two registers are compared, and the branch is taken or not according to the result.
+UNDERSTAND NOW: comparators and parity.
 For the lecturer: Comparatore. Many datapaths reuse the ALU instead: subtract and test whether the result is zero. Ordering comparisons (blt, slt) need the subtraction and the sign rules of Lecture 05.</a:t>
             </a:r>
             <a:endParaRPr lang="en-US" dirty="0"/>
@@ -1113,6 +1120,7 @@
             <a:r>
               <a:rPr lang="en-US" dirty="0"/>
               <a:t>The simplest redundant code adds one parity bit to each word, chosen so that the total number of 1s is, for example, even. The circuit that computes it is a parity network, a chain of XORs: the XOR of all the bits of a word is 1 when the number of 1s is odd, because XOR is addition modulo 2. The network is used twice: by the sender, to compute the bit to add, and by the receiver, to verify the parity of what arrived.
+UNDERSTAND NOW: comparators and parity.
 For the lecturer: Rete di parità. XOR is addition modulo 2, which is why a chain of XORs counts the 1s modulo 2.</a:t>
             </a:r>
             <a:endParaRPr lang="en-US" dirty="0"/>
@@ -1202,6 +1210,7 @@
             <a:r>
               <a:rPr lang="en-US" dirty="0"/>
               <a:t>The ALU receives two words, A and B. Inside it several units work at the same time on the same operands: an adder that also subtracts, a row of AND gates, a row of OR gates, a row of XOR gates, a shifter. All of them produce a result. A multiplexer lets one of the results through, and its selection lines come from a decoder that reads the instruction. There is no memory anywhere: the ALU is one large combinational machine, and its slowest path, the carry chain of the adder, limits the clock of the processor.
+UNDERSTAND NOW: the ALU.
 For the lecturer: Unità aritmetico-logica. The adder is the ripple-carry adder of Lecture 09, with the complement-and-carry trick of Lecture 05 for subtraction. Comparisons (slt) reuse the subtractor.</a:t>
             </a:r>
             <a:endParaRPr lang="en-US" dirty="0"/>
@@ -1649,6 +1658,7 @@
             <a:r>
               <a:rPr lang="en-US" dirty="0"/>
               <a:t>Five conclusions. A code writes each element of a set as a string of symbols over an alphabet, its code word. A fixed-length binary code needs the logarithm of N bits, rounded up; a redundant code spends more to detect errors. Encoding, decoding and transcoding are done by combinational machines. Multiplexers select a source, demultiplexers a destination, comparators and parity networks check. And the processor uses all of them. What these machines lack is memory: after Part 2 of Verm1, Lecture 13 adds it.
+Learning status, recap. UNDERSTAND NOW: multiplexers; combinational machines; codes; decoders and encoders; comparators and parity; the ALU. USE NOW: the complete program, the PRG32 tools (used, not studied, in this course). UNDERSTAND LATER: finite-state machines (Lecture 13). A slide without a badge is context: a story, an example, a question, an exercise.
 For the lecturer: Next: Verm1, part 2: steering and food. Then sequential machines: what is missing here is memory.</a:t>
             </a:r>
             <a:endParaRPr lang="en-US" dirty="0"/>
@@ -1738,6 +1748,7 @@
             <a:r>
               <a:rPr lang="en-US" dirty="0"/>
               <a:t>Digital circuits are of two kinds. In a combinational circuit the outputs at a given instant depend only on the inputs at that same instant: there is no memory and no feedback, and a truth table describes the circuit completely. In a sequential circuit the outputs depend also on the past history of the inputs: it needs the notions of time and of state. Adders, decoders and multiplexers are combinational; flip-flops, registers and the processor as a whole are sequential, and are the subject of Lecture 13.
+UNDERSTAND NOW: combinational machines. UNDERSTAND LATER: finite-state machines (studied in Lecture 13).
 For the lecturer: Reti combinatorie and reti sequenziali. The definition of a sequential circuit implies time and state: both are the subject of the next lecture.</a:t>
             </a:r>
             <a:endParaRPr lang="en-US" dirty="0"/>
@@ -1827,6 +1838,7 @@
             <a:r>
               <a:rPr lang="en-US" dirty="0"/>
               <a:t>A real gate does not answer instantly: its output settles after a propagation delay, as Lecture 10 explained. The delay of a network is that of its slowest path from an input to an output, the critical path. While signals are travelling the outputs may be temporarily wrong. So a combinational machine is correct only after it has settled, and something must say when to look at its outputs. That something is the clock, and it is where sequential machines begin.
+UNDERSTAND NOW: combinational machines.
 For the lecturer: In a ripple-carry adder (Lecture 09) the critical path crosses all thirty-two full adders. The clock period of a processor must be longer than its longest critical path.</a:t>
             </a:r>
             <a:endParaRPr lang="en-US" dirty="0"/>
@@ -1916,6 +1928,7 @@
             <a:r>
               <a:rPr lang="en-US" dirty="0"/>
               <a:t>A code associates each element of a set of N elements with a string of symbols, the code word. In a fixed-length code all the words have the same length m. With an alphabet of k symbols there are k to the m words, so m must be at least the logarithm of N, rounded up. In binary: fourteen marks need 4 bits, and the 32 registers of RISC-V need exactly 5. When N is not a power of two some words remain unused, and the code is incomplete.
+UNDERSTAND NOW: codes.
 For the lecturer: Codice a lunghezza fissa. The five bits of a register number are the fields rd, rs1 and rs2 of a RISC-V instruction (Lecture 02). Fourteen marks leave 16 - 14 = 2 unassigned words.</a:t>
             </a:r>
             <a:endParaRPr lang="en-US" dirty="0"/>
@@ -2005,6 +2018,7 @@
             <a:r>
               <a:rPr lang="en-US" dirty="0"/>
               <a:t>The classic incomplete code: decimal digits on four bits. In BCD 8421 each digit is simply its value in binary; in excess-3 the value is increased by three. Ten digits need four bits, and four bits give sixteen words, so six of them are never used: in BCD, the words from 1010 to 1111. Remember the caption: when you design a circuit that receives BCD digits, those six words are don't-cares and make the circuit simpler.
+UNDERSTAND NOW: codes.
 For the lecturer: Ten digits need ceil(log2 10) = 4 bits; six of the sixteen words are never used: in BCD 8421 they are 1010 to 1111. Unused words become don't-care conditions when we design a circuit (Lecture 09).</a:t>
             </a:r>
             <a:endParaRPr lang="en-US" dirty="0"/>
@@ -2094,6 +2108,7 @@
             <a:r>
               <a:rPr lang="en-US" dirty="0"/>
               <a:t>A redundant code uses more bits than the minimum, so only some of the possible words are legal. If a word arrives that is not legal, something altered it on the way, and the error is detected. Compare the two codes of the table. In Code 1 every 2-bit word is legal: an altered bit turns one element into another and nobody notices. Code 2 adds a third bit that makes the number of 1s even: any single altered bit produces an illegal word. Redundancy is the price paid for detecting errors.
+UNDERSTAND NOW: codes.
 For the lecturer: The original slide showed the same idea with a picture and a different choice of illegal words. Code 2 is Code 1 plus an even-parity bit: the parity machines come later in this lecture.</a:t>
             </a:r>
             <a:endParaRPr lang="en-US" dirty="0"/>
@@ -2183,6 +2198,7 @@
             <a:r>
               <a:rPr lang="en-US" dirty="0"/>
               <a:t>In the decoded representation there are as many bits as elements, and exactly one of them is 1: one line per element. It is also called one-hot. It is expensive in wires but immediately usable, because the active line can directly switch something on. The practical rule is in the last line: keep information in a compact code inside a word, and decode it where a choice has to be acted upon.
+UNDERSTAND NOW: decoders and encoders.
 For the lecturer: Also called one-hot. The seven lamps of lab 06 are a decoded representation of the bit number; the 32 write-enable lines of the RISC-V registers are another.</a:t>
             </a:r>
             <a:endParaRPr lang="en-US" dirty="0"/>
@@ -2272,6 +2288,7 @@
             <a:r>
               <a:rPr lang="en-US" dirty="0"/>
               <a:t>A decoder receives a code word of m bits and asserts the one output, out of 2 to the m, that corresponds to it. The table and the circuit show the 2-to-4 decoder: each output is a minterm of the two inputs, built with one AND gate and, where needed, inverters. So a decoder generates all the minterms of its inputs. An enable input, when it is 0, keeps all the outputs at 0: it will be the key to composing decoders.
+UNDERSTAND NOW: decoders and encoders.
 For the lecturer: Synthesis of the 2-to-4 decoder (1 out of 4). A is the least significant bit. Decodificatore: the block symbol is a box marked 1/N.</a:t>
             </a:r>
             <a:endParaRPr lang="en-US" dirty="0"/>
@@ -3409,6 +3426,420 @@
       </p:pic>
       <p:sp>
         <p:nvSpPr>
+          <p:cNvPr id="15" name="Shape 12"/>
+          <p:cNvSpPr/>
+          <p:nvPr/>
+        </p:nvSpPr>
+        <p:spPr>
+          <a:xfrm>
+            <a:off x="9690303" y="91440"/>
+            <a:ext cx="1952752" cy="274320"/>
+          </a:xfrm>
+          <a:prstGeom prst="rect">
+            <a:avLst/>
+          </a:prstGeom>
+          <a:solidFill>
+            <a:srgbClr val="F3E8FF"/>
+          </a:solidFill>
+          <a:ln w="12700">
+            <a:solidFill>
+              <a:srgbClr val="7E22CE"/>
+            </a:solidFill>
+            <a:prstDash val="dash"/>
+          </a:ln>
+        </p:spPr>
+      </p:sp>
+      <p:sp>
+        <p:nvSpPr>
+          <p:cNvPr id="16" name="Shape 13"/>
+          <p:cNvSpPr/>
+          <p:nvPr/>
+        </p:nvSpPr>
+        <p:spPr>
+          <a:xfrm>
+            <a:off x="9717735" y="128016"/>
+            <a:ext cx="45720" cy="45720"/>
+          </a:xfrm>
+          <a:prstGeom prst="rect">
+            <a:avLst/>
+          </a:prstGeom>
+          <a:solidFill>
+            <a:srgbClr val="7E22CE"/>
+          </a:solidFill>
+          <a:ln w="12700">
+            <a:solidFill>
+              <a:srgbClr val="7E22CE"/>
+            </a:solidFill>
+            <a:prstDash val="solid"/>
+          </a:ln>
+        </p:spPr>
+      </p:sp>
+      <p:sp>
+        <p:nvSpPr>
+          <p:cNvPr id="17" name="Shape 14"/>
+          <p:cNvSpPr/>
+          <p:nvPr/>
+        </p:nvSpPr>
+        <p:spPr>
+          <a:xfrm>
+            <a:off x="9717735" y="205740"/>
+            <a:ext cx="45720" cy="45720"/>
+          </a:xfrm>
+          <a:prstGeom prst="rect">
+            <a:avLst/>
+          </a:prstGeom>
+          <a:solidFill>
+            <a:srgbClr val="7E22CE"/>
+          </a:solidFill>
+          <a:ln w="12700">
+            <a:solidFill>
+              <a:srgbClr val="7E22CE"/>
+            </a:solidFill>
+            <a:prstDash val="solid"/>
+          </a:ln>
+        </p:spPr>
+      </p:sp>
+      <p:sp>
+        <p:nvSpPr>
+          <p:cNvPr id="18" name="Shape 15"/>
+          <p:cNvSpPr/>
+          <p:nvPr/>
+        </p:nvSpPr>
+        <p:spPr>
+          <a:xfrm>
+            <a:off x="9717735" y="283464"/>
+            <a:ext cx="45720" cy="45720"/>
+          </a:xfrm>
+          <a:prstGeom prst="rect">
+            <a:avLst/>
+          </a:prstGeom>
+          <a:solidFill>
+            <a:srgbClr val="7E22CE"/>
+          </a:solidFill>
+          <a:ln w="12700">
+            <a:solidFill>
+              <a:srgbClr val="7E22CE"/>
+            </a:solidFill>
+            <a:prstDash val="solid"/>
+          </a:ln>
+        </p:spPr>
+      </p:sp>
+      <p:pic>
+        <p:nvPicPr>
+          <p:cNvPr id="19" name="Image 1" descr="preencoded.png">    </p:cNvPr>
+          <p:cNvPicPr>
+            <a:picLocks noChangeAspect="1"/>
+          </p:cNvPicPr>
+          <p:nvPr/>
+        </p:nvPicPr>
+        <p:blipFill>
+          <a:blip r:embed="rId2"/>
+          <a:stretch>
+            <a:fillRect/>
+          </a:stretch>
+        </p:blipFill>
+        <p:spPr>
+          <a:xfrm>
+            <a:off x="9818319" y="128016"/>
+            <a:ext cx="201168" cy="201168"/>
+          </a:xfrm>
+          <a:prstGeom prst="rect">
+            <a:avLst/>
+          </a:prstGeom>
+        </p:spPr>
+      </p:pic>
+      <p:sp>
+        <p:nvSpPr>
+          <p:cNvPr id="20" name="Text 16"/>
+          <p:cNvSpPr txBox="1"/>
+          <p:nvPr/>
+        </p:nvSpPr>
+        <p:spPr>
+          <a:xfrm>
+            <a:off x="10074351" y="91440"/>
+            <a:ext cx="1532128" cy="274320"/>
+          </a:xfrm>
+          <a:prstGeom prst="rect">
+            <a:avLst/>
+          </a:prstGeom>
+          <a:noFill/>
+          <a:ln/>
+        </p:spPr>
+        <p:txBody>
+          <a:bodyPr wrap="square" lIns="0" tIns="0" rIns="0" bIns="0" rtlCol="0" anchor="ctr"/>
+          <a:lstStyle/>
+          <a:p>
+            <a:pPr indent="0" marL="0">
+              <a:buNone/>
+            </a:pPr>
+            <a:r>
+              <a:rPr lang="en-US" sz="1100" b="1" dirty="0">
+                <a:solidFill>
+                  <a:srgbClr val="6B21A8"/>
+                </a:solidFill>
+                <a:latin typeface="Calibri" pitchFamily="34" charset="0"/>
+                <a:ea typeface="Calibri" pitchFamily="34" charset="-122"/>
+                <a:cs typeface="Calibri" pitchFamily="34" charset="-120"/>
+              </a:rPr>
+              <a:t>UNDERSTAND LATER</a:t>
+            </a:r>
+            <a:endParaRPr lang="en-US" sz="1100" dirty="0"/>
+          </a:p>
+        </p:txBody>
+      </p:sp>
+      <p:sp>
+        <p:nvSpPr>
+          <p:cNvPr id="21" name="Shape 17"/>
+          <p:cNvSpPr/>
+          <p:nvPr/>
+        </p:nvSpPr>
+        <p:spPr>
+          <a:xfrm>
+            <a:off x="8407349" y="91440"/>
+            <a:ext cx="1173226" cy="274320"/>
+          </a:xfrm>
+          <a:prstGeom prst="rect">
+            <a:avLst/>
+          </a:prstGeom>
+          <a:solidFill>
+            <a:srgbClr val="FEF3C7"/>
+          </a:solidFill>
+          <a:ln w="12700">
+            <a:solidFill>
+              <a:srgbClr val="B45309"/>
+            </a:solidFill>
+            <a:prstDash val="solid"/>
+          </a:ln>
+        </p:spPr>
+      </p:sp>
+      <p:sp>
+        <p:nvSpPr>
+          <p:cNvPr id="22" name="Shape 18"/>
+          <p:cNvSpPr/>
+          <p:nvPr/>
+        </p:nvSpPr>
+        <p:spPr>
+          <a:xfrm>
+            <a:off x="8407349" y="91440"/>
+            <a:ext cx="27432" cy="274320"/>
+          </a:xfrm>
+          <a:prstGeom prst="rect">
+            <a:avLst/>
+          </a:prstGeom>
+          <a:solidFill>
+            <a:srgbClr val="B45309"/>
+          </a:solidFill>
+          <a:ln w="12700">
+            <a:solidFill>
+              <a:srgbClr val="B45309"/>
+            </a:solidFill>
+            <a:prstDash val="solid"/>
+          </a:ln>
+        </p:spPr>
+      </p:sp>
+      <p:sp>
+        <p:nvSpPr>
+          <p:cNvPr id="23" name="Shape 19"/>
+          <p:cNvSpPr/>
+          <p:nvPr/>
+        </p:nvSpPr>
+        <p:spPr>
+          <a:xfrm>
+            <a:off x="8462213" y="91440"/>
+            <a:ext cx="27432" cy="274320"/>
+          </a:xfrm>
+          <a:prstGeom prst="rect">
+            <a:avLst/>
+          </a:prstGeom>
+          <a:solidFill>
+            <a:srgbClr val="B45309"/>
+          </a:solidFill>
+          <a:ln w="12700">
+            <a:solidFill>
+              <a:srgbClr val="B45309"/>
+            </a:solidFill>
+            <a:prstDash val="solid"/>
+          </a:ln>
+        </p:spPr>
+      </p:sp>
+      <p:pic>
+        <p:nvPicPr>
+          <p:cNvPr id="24" name="Image 2" descr="preencoded.png">    </p:cNvPr>
+          <p:cNvPicPr>
+            <a:picLocks noChangeAspect="1"/>
+          </p:cNvPicPr>
+          <p:nvPr/>
+        </p:nvPicPr>
+        <p:blipFill>
+          <a:blip r:embed="rId3"/>
+          <a:stretch>
+            <a:fillRect/>
+          </a:stretch>
+        </p:blipFill>
+        <p:spPr>
+          <a:xfrm>
+            <a:off x="8535365" y="128016"/>
+            <a:ext cx="201168" cy="201168"/>
+          </a:xfrm>
+          <a:prstGeom prst="rect">
+            <a:avLst/>
+          </a:prstGeom>
+        </p:spPr>
+      </p:pic>
+      <p:sp>
+        <p:nvSpPr>
+          <p:cNvPr id="25" name="Text 20"/>
+          <p:cNvSpPr txBox="1"/>
+          <p:nvPr/>
+        </p:nvSpPr>
+        <p:spPr>
+          <a:xfrm>
+            <a:off x="8791397" y="91440"/>
+            <a:ext cx="752602" cy="274320"/>
+          </a:xfrm>
+          <a:prstGeom prst="rect">
+            <a:avLst/>
+          </a:prstGeom>
+          <a:noFill/>
+          <a:ln/>
+        </p:spPr>
+        <p:txBody>
+          <a:bodyPr wrap="square" lIns="0" tIns="0" rIns="0" bIns="0" rtlCol="0" anchor="ctr"/>
+          <a:lstStyle/>
+          <a:p>
+            <a:pPr indent="0" marL="0">
+              <a:buNone/>
+            </a:pPr>
+            <a:r>
+              <a:rPr lang="en-US" sz="1100" b="1" dirty="0">
+                <a:solidFill>
+                  <a:srgbClr val="92400E"/>
+                </a:solidFill>
+                <a:latin typeface="Calibri" pitchFamily="34" charset="0"/>
+                <a:ea typeface="Calibri" pitchFamily="34" charset="-122"/>
+                <a:cs typeface="Calibri" pitchFamily="34" charset="-120"/>
+              </a:rPr>
+              <a:t>USE NOW</a:t>
+            </a:r>
+            <a:endParaRPr lang="en-US" sz="1100" dirty="0"/>
+          </a:p>
+        </p:txBody>
+      </p:sp>
+      <p:sp>
+        <p:nvSpPr>
+          <p:cNvPr id="26" name="Shape 21"/>
+          <p:cNvSpPr/>
+          <p:nvPr/>
+        </p:nvSpPr>
+        <p:spPr>
+          <a:xfrm>
+            <a:off x="6518097" y="91440"/>
+            <a:ext cx="1779524" cy="274320"/>
+          </a:xfrm>
+          <a:prstGeom prst="rect">
+            <a:avLst/>
+          </a:prstGeom>
+          <a:solidFill>
+            <a:srgbClr val="E0F2FE"/>
+          </a:solidFill>
+          <a:ln w="12700">
+            <a:solidFill>
+              <a:srgbClr val="0369A1"/>
+            </a:solidFill>
+            <a:prstDash val="solid"/>
+          </a:ln>
+        </p:spPr>
+      </p:sp>
+      <p:sp>
+        <p:nvSpPr>
+          <p:cNvPr id="27" name="Shape 22"/>
+          <p:cNvSpPr/>
+          <p:nvPr/>
+        </p:nvSpPr>
+        <p:spPr>
+          <a:xfrm>
+            <a:off x="6518097" y="91440"/>
+            <a:ext cx="73152" cy="274320"/>
+          </a:xfrm>
+          <a:prstGeom prst="rect">
+            <a:avLst/>
+          </a:prstGeom>
+          <a:solidFill>
+            <a:srgbClr val="0369A1"/>
+          </a:solidFill>
+          <a:ln w="12700">
+            <a:solidFill>
+              <a:srgbClr val="0369A1"/>
+            </a:solidFill>
+            <a:prstDash val="solid"/>
+          </a:ln>
+        </p:spPr>
+      </p:sp>
+      <p:pic>
+        <p:nvPicPr>
+          <p:cNvPr id="28" name="Image 3" descr="preencoded.png">    </p:cNvPr>
+          <p:cNvPicPr>
+            <a:picLocks noChangeAspect="1"/>
+          </p:cNvPicPr>
+          <p:nvPr/>
+        </p:nvPicPr>
+        <p:blipFill>
+          <a:blip r:embed="rId4"/>
+          <a:stretch>
+            <a:fillRect/>
+          </a:stretch>
+        </p:blipFill>
+        <p:spPr>
+          <a:xfrm>
+            <a:off x="6646113" y="128016"/>
+            <a:ext cx="201168" cy="201168"/>
+          </a:xfrm>
+          <a:prstGeom prst="rect">
+            <a:avLst/>
+          </a:prstGeom>
+        </p:spPr>
+      </p:pic>
+      <p:sp>
+        <p:nvSpPr>
+          <p:cNvPr id="29" name="Text 23"/>
+          <p:cNvSpPr txBox="1"/>
+          <p:nvPr/>
+        </p:nvSpPr>
+        <p:spPr>
+          <a:xfrm>
+            <a:off x="6902145" y="91440"/>
+            <a:ext cx="1358900" cy="274320"/>
+          </a:xfrm>
+          <a:prstGeom prst="rect">
+            <a:avLst/>
+          </a:prstGeom>
+          <a:noFill/>
+          <a:ln/>
+        </p:spPr>
+        <p:txBody>
+          <a:bodyPr wrap="square" lIns="0" tIns="0" rIns="0" bIns="0" rtlCol="0" anchor="ctr"/>
+          <a:lstStyle/>
+          <a:p>
+            <a:pPr indent="0" marL="0">
+              <a:buNone/>
+            </a:pPr>
+            <a:r>
+              <a:rPr lang="en-US" sz="1100" b="1" dirty="0">
+                <a:solidFill>
+                  <a:srgbClr val="075985"/>
+                </a:solidFill>
+                <a:latin typeface="Calibri" pitchFamily="34" charset="0"/>
+                <a:ea typeface="Calibri" pitchFamily="34" charset="-122"/>
+                <a:cs typeface="Calibri" pitchFamily="34" charset="-120"/>
+              </a:rPr>
+              <a:t>UNDERSTAND NOW</a:t>
+            </a:r>
+            <a:endParaRPr lang="en-US" sz="1100" dirty="0"/>
+          </a:p>
+        </p:txBody>
+      </p:sp>
+      <p:sp>
+        <p:nvSpPr>
           <p:cNvPr id="25" name="Slide Number Placeholder 0"/>
           <p:cNvSpPr>
             <a:spLocks noGrp="1"/>
@@ -3916,6 +4347,133 @@
       </p:sp>
       <p:sp>
         <p:nvSpPr>
+          <p:cNvPr id="14" name="Shape 12"/>
+          <p:cNvSpPr/>
+          <p:nvPr/>
+        </p:nvSpPr>
+        <p:spPr>
+          <a:xfrm>
+            <a:off x="8287715" y="91440"/>
+            <a:ext cx="3355340" cy="274320"/>
+          </a:xfrm>
+          <a:prstGeom prst="rect">
+            <a:avLst/>
+          </a:prstGeom>
+          <a:solidFill>
+            <a:srgbClr val="E0F2FE"/>
+          </a:solidFill>
+          <a:ln w="12700">
+            <a:solidFill>
+              <a:srgbClr val="0369A1"/>
+            </a:solidFill>
+            <a:prstDash val="solid"/>
+          </a:ln>
+        </p:spPr>
+      </p:sp>
+      <p:sp>
+        <p:nvSpPr>
+          <p:cNvPr id="15" name="Shape 13"/>
+          <p:cNvSpPr/>
+          <p:nvPr/>
+        </p:nvSpPr>
+        <p:spPr>
+          <a:xfrm>
+            <a:off x="8287715" y="91440"/>
+            <a:ext cx="73152" cy="274320"/>
+          </a:xfrm>
+          <a:prstGeom prst="rect">
+            <a:avLst/>
+          </a:prstGeom>
+          <a:solidFill>
+            <a:srgbClr val="0369A1"/>
+          </a:solidFill>
+          <a:ln w="12700">
+            <a:solidFill>
+              <a:srgbClr val="0369A1"/>
+            </a:solidFill>
+            <a:prstDash val="solid"/>
+          </a:ln>
+        </p:spPr>
+      </p:sp>
+      <p:pic>
+        <p:nvPicPr>
+          <p:cNvPr id="16" name="Image 0" descr="preencoded.png">    </p:cNvPr>
+          <p:cNvPicPr>
+            <a:picLocks noChangeAspect="1"/>
+          </p:cNvPicPr>
+          <p:nvPr/>
+        </p:nvPicPr>
+        <p:blipFill>
+          <a:blip r:embed="rId1"/>
+          <a:stretch>
+            <a:fillRect/>
+          </a:stretch>
+        </p:blipFill>
+        <p:spPr>
+          <a:xfrm>
+            <a:off x="8415731" y="128016"/>
+            <a:ext cx="201168" cy="201168"/>
+          </a:xfrm>
+          <a:prstGeom prst="rect">
+            <a:avLst/>
+          </a:prstGeom>
+        </p:spPr>
+      </p:pic>
+      <p:sp>
+        <p:nvSpPr>
+          <p:cNvPr id="17" name="Text 14"/>
+          <p:cNvSpPr txBox="1"/>
+          <p:nvPr/>
+        </p:nvSpPr>
+        <p:spPr>
+          <a:xfrm>
+            <a:off x="8671763" y="91440"/>
+            <a:ext cx="2934716" cy="274320"/>
+          </a:xfrm>
+          <a:prstGeom prst="rect">
+            <a:avLst/>
+          </a:prstGeom>
+          <a:noFill/>
+          <a:ln/>
+        </p:spPr>
+        <p:txBody>
+          <a:bodyPr wrap="square" lIns="0" tIns="0" rIns="0" bIns="0" rtlCol="0" anchor="ctr"/>
+          <a:lstStyle/>
+          <a:p>
+            <a:pPr indent="0" marL="0">
+              <a:buNone/>
+            </a:pPr>
+            <a:r>
+              <a:rPr lang="en-US" sz="1100" b="1" dirty="0">
+                <a:solidFill>
+                  <a:srgbClr val="075985"/>
+                </a:solidFill>
+                <a:latin typeface="Calibri" pitchFamily="34" charset="0"/>
+                <a:ea typeface="Calibri" pitchFamily="34" charset="-122"/>
+                <a:cs typeface="Calibri" pitchFamily="34" charset="-120"/>
+              </a:rPr>
+              <a:t>UNDERSTAND NOW</a:t>
+            </a:r>
+            <a:pPr indent="0" marL="0">
+              <a:buNone/>
+            </a:pPr>
+            <a:r>
+              <a:rPr lang="en-US" sz="1100" dirty="0">
+                <a:solidFill>
+                  <a:srgbClr val="075985"/>
+                </a:solidFill>
+                <a:latin typeface="Calibri" pitchFamily="34" charset="0"/>
+                <a:ea typeface="Calibri" pitchFamily="34" charset="-122"/>
+                <a:cs typeface="Calibri" pitchFamily="34" charset="-120"/>
+              </a:rPr>
+              <a:t> · decoders and encoders</a:t>
+            </a:r>
+            <a:endParaRPr lang="en-US" sz="1100" dirty="0"/>
+          </a:p>
+        </p:txBody>
+      </p:sp>
+      <p:sp>
+        <p:nvSpPr>
           <p:cNvPr id="25" name="Slide Number Placeholder 0"/>
           <p:cNvSpPr>
             <a:spLocks noGrp="1"/>
@@ -4028,9 +4586,59 @@
           </a:p>
         </p:txBody>
       </p:sp>
+      <p:sp>
+        <p:nvSpPr>
+          <p:cNvPr id="3" name="Shape 1"/>
+          <p:cNvSpPr/>
+          <p:nvPr/>
+        </p:nvSpPr>
+        <p:spPr>
+          <a:xfrm>
+            <a:off x="8287715" y="91440"/>
+            <a:ext cx="3355340" cy="274320"/>
+          </a:xfrm>
+          <a:prstGeom prst="rect">
+            <a:avLst/>
+          </a:prstGeom>
+          <a:solidFill>
+            <a:srgbClr val="E0F2FE"/>
+          </a:solidFill>
+          <a:ln w="12700">
+            <a:solidFill>
+              <a:srgbClr val="0369A1"/>
+            </a:solidFill>
+            <a:prstDash val="solid"/>
+          </a:ln>
+        </p:spPr>
+      </p:sp>
+      <p:sp>
+        <p:nvSpPr>
+          <p:cNvPr id="4" name="Shape 2"/>
+          <p:cNvSpPr/>
+          <p:nvPr/>
+        </p:nvSpPr>
+        <p:spPr>
+          <a:xfrm>
+            <a:off x="8287715" y="91440"/>
+            <a:ext cx="73152" cy="274320"/>
+          </a:xfrm>
+          <a:prstGeom prst="rect">
+            <a:avLst/>
+          </a:prstGeom>
+          <a:solidFill>
+            <a:srgbClr val="0369A1"/>
+          </a:solidFill>
+          <a:ln w="12700">
+            <a:solidFill>
+              <a:srgbClr val="0369A1"/>
+            </a:solidFill>
+            <a:prstDash val="solid"/>
+          </a:ln>
+        </p:spPr>
+      </p:sp>
       <p:pic>
         <p:nvPicPr>
-          <p:cNvPr id="4" name="Image 0" descr="preencoded.png">    </p:cNvPr>
+          <p:cNvPr id="5" name="Image 0" descr="preencoded.png">    </p:cNvPr>
           <p:cNvPicPr>
             <a:picLocks noChangeAspect="1"/>
           </p:cNvPicPr>
@@ -4038,6 +4646,83 @@
         </p:nvPicPr>
         <p:blipFill>
           <a:blip r:embed="rId1"/>
+          <a:stretch>
+            <a:fillRect/>
+          </a:stretch>
+        </p:blipFill>
+        <p:spPr>
+          <a:xfrm>
+            <a:off x="8415731" y="128016"/>
+            <a:ext cx="201168" cy="201168"/>
+          </a:xfrm>
+          <a:prstGeom prst="rect">
+            <a:avLst/>
+          </a:prstGeom>
+        </p:spPr>
+      </p:pic>
+      <p:sp>
+        <p:nvSpPr>
+          <p:cNvPr id="6" name="Text 3"/>
+          <p:cNvSpPr txBox="1"/>
+          <p:nvPr/>
+        </p:nvSpPr>
+        <p:spPr>
+          <a:xfrm>
+            <a:off x="8671763" y="91440"/>
+            <a:ext cx="2934716" cy="274320"/>
+          </a:xfrm>
+          <a:prstGeom prst="rect">
+            <a:avLst/>
+          </a:prstGeom>
+          <a:noFill/>
+          <a:ln/>
+        </p:spPr>
+        <p:txBody>
+          <a:bodyPr wrap="square" lIns="0" tIns="0" rIns="0" bIns="0" rtlCol="0" anchor="ctr"/>
+          <a:lstStyle/>
+          <a:p>
+            <a:pPr indent="0" marL="0">
+              <a:buNone/>
+            </a:pPr>
+            <a:r>
+              <a:rPr lang="en-US" sz="1100" b="1" dirty="0">
+                <a:solidFill>
+                  <a:srgbClr val="075985"/>
+                </a:solidFill>
+                <a:latin typeface="Calibri" pitchFamily="34" charset="0"/>
+                <a:ea typeface="Calibri" pitchFamily="34" charset="-122"/>
+                <a:cs typeface="Calibri" pitchFamily="34" charset="-120"/>
+              </a:rPr>
+              <a:t>UNDERSTAND NOW</a:t>
+            </a:r>
+            <a:pPr indent="0" marL="0">
+              <a:buNone/>
+            </a:pPr>
+            <a:r>
+              <a:rPr lang="en-US" sz="1100" dirty="0">
+                <a:solidFill>
+                  <a:srgbClr val="075985"/>
+                </a:solidFill>
+                <a:latin typeface="Calibri" pitchFamily="34" charset="0"/>
+                <a:ea typeface="Calibri" pitchFamily="34" charset="-122"/>
+                <a:cs typeface="Calibri" pitchFamily="34" charset="-120"/>
+              </a:rPr>
+              <a:t> · decoders and encoders</a:t>
+            </a:r>
+            <a:endParaRPr lang="en-US" sz="1100" dirty="0"/>
+          </a:p>
+        </p:txBody>
+      </p:sp>
+      <p:pic>
+        <p:nvPicPr>
+          <p:cNvPr id="8" name="Image 1" descr="preencoded.png">    </p:cNvPr>
+          <p:cNvPicPr>
+            <a:picLocks noChangeAspect="1"/>
+          </p:cNvPicPr>
+          <p:nvPr/>
+        </p:nvPicPr>
+        <p:blipFill>
+          <a:blip r:embed="rId2"/>
           <a:stretch>
             <a:fillRect/>
           </a:stretch>
@@ -10845,7 +11530,7 @@
       </p:graphicFrame>
       <p:sp>
         <p:nvSpPr>
-          <p:cNvPr id="6" name="Shape 1"/>
+          <p:cNvPr id="10" name="Shape 4"/>
           <p:cNvSpPr/>
           <p:nvPr/>
         </p:nvSpPr>
@@ -10872,7 +11557,7 @@
       </p:sp>
       <p:sp>
         <p:nvSpPr>
-          <p:cNvPr id="7" name="Text 2"/>
+          <p:cNvPr id="11" name="Text 5"/>
           <p:cNvSpPr txBox="1"/>
           <p:nvPr/>
         </p:nvSpPr>
@@ -11431,9 +12116,59 @@
           </a:ln>
         </p:spPr>
       </p:sp>
+      <p:sp>
+        <p:nvSpPr>
+          <p:cNvPr id="13" name="Shape 11"/>
+          <p:cNvSpPr/>
+          <p:nvPr/>
+        </p:nvSpPr>
+        <p:spPr>
+          <a:xfrm>
+            <a:off x="8878646" y="91440"/>
+            <a:ext cx="2764409" cy="274320"/>
+          </a:xfrm>
+          <a:prstGeom prst="rect">
+            <a:avLst/>
+          </a:prstGeom>
+          <a:solidFill>
+            <a:srgbClr val="E0F2FE"/>
+          </a:solidFill>
+          <a:ln w="12700">
+            <a:solidFill>
+              <a:srgbClr val="0369A1"/>
+            </a:solidFill>
+            <a:prstDash val="solid"/>
+          </a:ln>
+        </p:spPr>
+      </p:sp>
+      <p:sp>
+        <p:nvSpPr>
+          <p:cNvPr id="14" name="Shape 12"/>
+          <p:cNvSpPr/>
+          <p:nvPr/>
+        </p:nvSpPr>
+        <p:spPr>
+          <a:xfrm>
+            <a:off x="8878646" y="91440"/>
+            <a:ext cx="73152" cy="274320"/>
+          </a:xfrm>
+          <a:prstGeom prst="rect">
+            <a:avLst/>
+          </a:prstGeom>
+          <a:solidFill>
+            <a:srgbClr val="0369A1"/>
+          </a:solidFill>
+          <a:ln w="12700">
+            <a:solidFill>
+              <a:srgbClr val="0369A1"/>
+            </a:solidFill>
+            <a:prstDash val="solid"/>
+          </a:ln>
+        </p:spPr>
+      </p:sp>
       <p:pic>
         <p:nvPicPr>
-          <p:cNvPr id="14" name="Image 0" descr="preencoded.png">    </p:cNvPr>
+          <p:cNvPr id="15" name="Image 0" descr="preencoded.png">    </p:cNvPr>
           <p:cNvPicPr>
             <a:picLocks noChangeAspect="1"/>
           </p:cNvPicPr>
@@ -11447,6 +12182,83 @@
         </p:blipFill>
         <p:spPr>
           <a:xfrm>
+            <a:off x="9006662" y="128016"/>
+            <a:ext cx="201168" cy="201168"/>
+          </a:xfrm>
+          <a:prstGeom prst="rect">
+            <a:avLst/>
+          </a:prstGeom>
+        </p:spPr>
+      </p:pic>
+      <p:sp>
+        <p:nvSpPr>
+          <p:cNvPr id="16" name="Text 13"/>
+          <p:cNvSpPr txBox="1"/>
+          <p:nvPr/>
+        </p:nvSpPr>
+        <p:spPr>
+          <a:xfrm>
+            <a:off x="9262694" y="91440"/>
+            <a:ext cx="2343785" cy="274320"/>
+          </a:xfrm>
+          <a:prstGeom prst="rect">
+            <a:avLst/>
+          </a:prstGeom>
+          <a:noFill/>
+          <a:ln/>
+        </p:spPr>
+        <p:txBody>
+          <a:bodyPr wrap="square" lIns="0" tIns="0" rIns="0" bIns="0" rtlCol="0" anchor="ctr"/>
+          <a:lstStyle/>
+          <a:p>
+            <a:pPr indent="0" marL="0">
+              <a:buNone/>
+            </a:pPr>
+            <a:r>
+              <a:rPr lang="en-US" sz="1100" b="1" dirty="0">
+                <a:solidFill>
+                  <a:srgbClr val="075985"/>
+                </a:solidFill>
+                <a:latin typeface="Calibri" pitchFamily="34" charset="0"/>
+                <a:ea typeface="Calibri" pitchFamily="34" charset="-122"/>
+                <a:cs typeface="Calibri" pitchFamily="34" charset="-120"/>
+              </a:rPr>
+              <a:t>UNDERSTAND NOW</a:t>
+            </a:r>
+            <a:pPr indent="0" marL="0">
+              <a:buNone/>
+            </a:pPr>
+            <a:r>
+              <a:rPr lang="en-US" sz="1100" dirty="0">
+                <a:solidFill>
+                  <a:srgbClr val="075985"/>
+                </a:solidFill>
+                <a:latin typeface="Calibri" pitchFamily="34" charset="0"/>
+                <a:ea typeface="Calibri" pitchFamily="34" charset="-122"/>
+                <a:cs typeface="Calibri" pitchFamily="34" charset="-120"/>
+              </a:rPr>
+              <a:t> · multiplexers</a:t>
+            </a:r>
+            <a:endParaRPr lang="en-US" sz="1100" dirty="0"/>
+          </a:p>
+        </p:txBody>
+      </p:sp>
+      <p:pic>
+        <p:nvPicPr>
+          <p:cNvPr id="18" name="Image 1" descr="preencoded.png">    </p:cNvPr>
+          <p:cNvPicPr>
+            <a:picLocks noChangeAspect="1"/>
+          </p:cNvPicPr>
+          <p:nvPr/>
+        </p:nvPicPr>
+        <p:blipFill>
+          <a:blip r:embed="rId2"/>
+          <a:stretch>
+            <a:fillRect/>
+          </a:stretch>
+        </p:blipFill>
+        <p:spPr>
+          <a:xfrm>
             <a:off x="6583680" y="2347036"/>
             <a:ext cx="4876495" cy="2438248"/>
           </a:xfrm>
@@ -11457,7 +12269,7 @@
       </p:pic>
       <p:sp>
         <p:nvSpPr>
-          <p:cNvPr id="15" name="Text 11"/>
+          <p:cNvPr id="19" name="Text 14"/>
           <p:cNvSpPr txBox="1"/>
           <p:nvPr/>
         </p:nvSpPr>
@@ -14084,6 +14896,133 @@
       </p:sp>
       <p:sp>
         <p:nvSpPr>
+          <p:cNvPr id="15" name="Shape 12"/>
+          <p:cNvSpPr/>
+          <p:nvPr/>
+        </p:nvSpPr>
+        <p:spPr>
+          <a:xfrm>
+            <a:off x="8878646" y="91440"/>
+            <a:ext cx="2764409" cy="274320"/>
+          </a:xfrm>
+          <a:prstGeom prst="rect">
+            <a:avLst/>
+          </a:prstGeom>
+          <a:solidFill>
+            <a:srgbClr val="E0F2FE"/>
+          </a:solidFill>
+          <a:ln w="12700">
+            <a:solidFill>
+              <a:srgbClr val="0369A1"/>
+            </a:solidFill>
+            <a:prstDash val="solid"/>
+          </a:ln>
+        </p:spPr>
+      </p:sp>
+      <p:sp>
+        <p:nvSpPr>
+          <p:cNvPr id="16" name="Shape 13"/>
+          <p:cNvSpPr/>
+          <p:nvPr/>
+        </p:nvSpPr>
+        <p:spPr>
+          <a:xfrm>
+            <a:off x="8878646" y="91440"/>
+            <a:ext cx="73152" cy="274320"/>
+          </a:xfrm>
+          <a:prstGeom prst="rect">
+            <a:avLst/>
+          </a:prstGeom>
+          <a:solidFill>
+            <a:srgbClr val="0369A1"/>
+          </a:solidFill>
+          <a:ln w="12700">
+            <a:solidFill>
+              <a:srgbClr val="0369A1"/>
+            </a:solidFill>
+            <a:prstDash val="solid"/>
+          </a:ln>
+        </p:spPr>
+      </p:sp>
+      <p:pic>
+        <p:nvPicPr>
+          <p:cNvPr id="17" name="Image 0" descr="preencoded.png">    </p:cNvPr>
+          <p:cNvPicPr>
+            <a:picLocks noChangeAspect="1"/>
+          </p:cNvPicPr>
+          <p:nvPr/>
+        </p:nvPicPr>
+        <p:blipFill>
+          <a:blip r:embed="rId1"/>
+          <a:stretch>
+            <a:fillRect/>
+          </a:stretch>
+        </p:blipFill>
+        <p:spPr>
+          <a:xfrm>
+            <a:off x="9006662" y="128016"/>
+            <a:ext cx="201168" cy="201168"/>
+          </a:xfrm>
+          <a:prstGeom prst="rect">
+            <a:avLst/>
+          </a:prstGeom>
+        </p:spPr>
+      </p:pic>
+      <p:sp>
+        <p:nvSpPr>
+          <p:cNvPr id="18" name="Text 14"/>
+          <p:cNvSpPr txBox="1"/>
+          <p:nvPr/>
+        </p:nvSpPr>
+        <p:spPr>
+          <a:xfrm>
+            <a:off x="9262694" y="91440"/>
+            <a:ext cx="2343785" cy="274320"/>
+          </a:xfrm>
+          <a:prstGeom prst="rect">
+            <a:avLst/>
+          </a:prstGeom>
+          <a:noFill/>
+          <a:ln/>
+        </p:spPr>
+        <p:txBody>
+          <a:bodyPr wrap="square" lIns="0" tIns="0" rIns="0" bIns="0" rtlCol="0" anchor="ctr"/>
+          <a:lstStyle/>
+          <a:p>
+            <a:pPr indent="0" marL="0">
+              <a:buNone/>
+            </a:pPr>
+            <a:r>
+              <a:rPr lang="en-US" sz="1100" b="1" dirty="0">
+                <a:solidFill>
+                  <a:srgbClr val="075985"/>
+                </a:solidFill>
+                <a:latin typeface="Calibri" pitchFamily="34" charset="0"/>
+                <a:ea typeface="Calibri" pitchFamily="34" charset="-122"/>
+                <a:cs typeface="Calibri" pitchFamily="34" charset="-120"/>
+              </a:rPr>
+              <a:t>UNDERSTAND NOW</a:t>
+            </a:r>
+            <a:pPr indent="0" marL="0">
+              <a:buNone/>
+            </a:pPr>
+            <a:r>
+              <a:rPr lang="en-US" sz="1100" dirty="0">
+                <a:solidFill>
+                  <a:srgbClr val="075985"/>
+                </a:solidFill>
+                <a:latin typeface="Calibri" pitchFamily="34" charset="0"/>
+                <a:ea typeface="Calibri" pitchFamily="34" charset="-122"/>
+                <a:cs typeface="Calibri" pitchFamily="34" charset="-120"/>
+              </a:rPr>
+              <a:t> · multiplexers</a:t>
+            </a:r>
+            <a:endParaRPr lang="en-US" sz="1100" dirty="0"/>
+          </a:p>
+        </p:txBody>
+      </p:sp>
+      <p:sp>
+        <p:nvSpPr>
           <p:cNvPr id="25" name="Slide Number Placeholder 0"/>
           <p:cNvSpPr>
             <a:spLocks noGrp="1"/>
@@ -14550,9 +15489,59 @@
           </a:ln>
         </p:spPr>
       </p:sp>
+      <p:sp>
+        <p:nvSpPr>
+          <p:cNvPr id="13" name="Shape 11"/>
+          <p:cNvSpPr/>
+          <p:nvPr/>
+        </p:nvSpPr>
+        <p:spPr>
+          <a:xfrm>
+            <a:off x="8222056" y="91440"/>
+            <a:ext cx="3420999" cy="274320"/>
+          </a:xfrm>
+          <a:prstGeom prst="rect">
+            <a:avLst/>
+          </a:prstGeom>
+          <a:solidFill>
+            <a:srgbClr val="E0F2FE"/>
+          </a:solidFill>
+          <a:ln w="12700">
+            <a:solidFill>
+              <a:srgbClr val="0369A1"/>
+            </a:solidFill>
+            <a:prstDash val="solid"/>
+          </a:ln>
+        </p:spPr>
+      </p:sp>
+      <p:sp>
+        <p:nvSpPr>
+          <p:cNvPr id="14" name="Shape 12"/>
+          <p:cNvSpPr/>
+          <p:nvPr/>
+        </p:nvSpPr>
+        <p:spPr>
+          <a:xfrm>
+            <a:off x="8222056" y="91440"/>
+            <a:ext cx="73152" cy="274320"/>
+          </a:xfrm>
+          <a:prstGeom prst="rect">
+            <a:avLst/>
+          </a:prstGeom>
+          <a:solidFill>
+            <a:srgbClr val="0369A1"/>
+          </a:solidFill>
+          <a:ln w="12700">
+            <a:solidFill>
+              <a:srgbClr val="0369A1"/>
+            </a:solidFill>
+            <a:prstDash val="solid"/>
+          </a:ln>
+        </p:spPr>
+      </p:sp>
       <p:pic>
         <p:nvPicPr>
-          <p:cNvPr id="14" name="Image 0" descr="preencoded.png">    </p:cNvPr>
+          <p:cNvPr id="15" name="Image 0" descr="preencoded.png">    </p:cNvPr>
           <p:cNvPicPr>
             <a:picLocks noChangeAspect="1"/>
           </p:cNvPicPr>
@@ -14566,6 +15555,83 @@
         </p:blipFill>
         <p:spPr>
           <a:xfrm>
+            <a:off x="8350072" y="128016"/>
+            <a:ext cx="201168" cy="201168"/>
+          </a:xfrm>
+          <a:prstGeom prst="rect">
+            <a:avLst/>
+          </a:prstGeom>
+        </p:spPr>
+      </p:pic>
+      <p:sp>
+        <p:nvSpPr>
+          <p:cNvPr id="16" name="Text 13"/>
+          <p:cNvSpPr txBox="1"/>
+          <p:nvPr/>
+        </p:nvSpPr>
+        <p:spPr>
+          <a:xfrm>
+            <a:off x="8606104" y="91440"/>
+            <a:ext cx="3000375" cy="274320"/>
+          </a:xfrm>
+          <a:prstGeom prst="rect">
+            <a:avLst/>
+          </a:prstGeom>
+          <a:noFill/>
+          <a:ln/>
+        </p:spPr>
+        <p:txBody>
+          <a:bodyPr wrap="square" lIns="0" tIns="0" rIns="0" bIns="0" rtlCol="0" anchor="ctr"/>
+          <a:lstStyle/>
+          <a:p>
+            <a:pPr indent="0" marL="0">
+              <a:buNone/>
+            </a:pPr>
+            <a:r>
+              <a:rPr lang="en-US" sz="1100" b="1" dirty="0">
+                <a:solidFill>
+                  <a:srgbClr val="075985"/>
+                </a:solidFill>
+                <a:latin typeface="Calibri" pitchFamily="34" charset="0"/>
+                <a:ea typeface="Calibri" pitchFamily="34" charset="-122"/>
+                <a:cs typeface="Calibri" pitchFamily="34" charset="-120"/>
+              </a:rPr>
+              <a:t>UNDERSTAND NOW</a:t>
+            </a:r>
+            <a:pPr indent="0" marL="0">
+              <a:buNone/>
+            </a:pPr>
+            <a:r>
+              <a:rPr lang="en-US" sz="1100" dirty="0">
+                <a:solidFill>
+                  <a:srgbClr val="075985"/>
+                </a:solidFill>
+                <a:latin typeface="Calibri" pitchFamily="34" charset="0"/>
+                <a:ea typeface="Calibri" pitchFamily="34" charset="-122"/>
+                <a:cs typeface="Calibri" pitchFamily="34" charset="-120"/>
+              </a:rPr>
+              <a:t> · comparators and parity</a:t>
+            </a:r>
+            <a:endParaRPr lang="en-US" sz="1100" dirty="0"/>
+          </a:p>
+        </p:txBody>
+      </p:sp>
+      <p:pic>
+        <p:nvPicPr>
+          <p:cNvPr id="18" name="Image 1" descr="preencoded.png">    </p:cNvPr>
+          <p:cNvPicPr>
+            <a:picLocks noChangeAspect="1"/>
+          </p:cNvPicPr>
+          <p:nvPr/>
+        </p:nvPicPr>
+        <p:blipFill>
+          <a:blip r:embed="rId2"/>
+          <a:stretch>
+            <a:fillRect/>
+          </a:stretch>
+        </p:blipFill>
+        <p:spPr>
+          <a:xfrm>
             <a:off x="7132320" y="2618778"/>
             <a:ext cx="4327855" cy="1894765"/>
           </a:xfrm>
@@ -14576,7 +15642,7 @@
       </p:pic>
       <p:sp>
         <p:nvSpPr>
-          <p:cNvPr id="15" name="Text 11"/>
+          <p:cNvPr id="19" name="Text 14"/>
           <p:cNvSpPr txBox="1"/>
           <p:nvPr/>
         </p:nvSpPr>
@@ -15162,6 +16228,133 @@
       </p:sp>
       <p:sp>
         <p:nvSpPr>
+          <p:cNvPr id="14" name="Shape 12"/>
+          <p:cNvSpPr/>
+          <p:nvPr/>
+        </p:nvSpPr>
+        <p:spPr>
+          <a:xfrm>
+            <a:off x="8222056" y="91440"/>
+            <a:ext cx="3420999" cy="274320"/>
+          </a:xfrm>
+          <a:prstGeom prst="rect">
+            <a:avLst/>
+          </a:prstGeom>
+          <a:solidFill>
+            <a:srgbClr val="E0F2FE"/>
+          </a:solidFill>
+          <a:ln w="12700">
+            <a:solidFill>
+              <a:srgbClr val="0369A1"/>
+            </a:solidFill>
+            <a:prstDash val="solid"/>
+          </a:ln>
+        </p:spPr>
+      </p:sp>
+      <p:sp>
+        <p:nvSpPr>
+          <p:cNvPr id="15" name="Shape 13"/>
+          <p:cNvSpPr/>
+          <p:nvPr/>
+        </p:nvSpPr>
+        <p:spPr>
+          <a:xfrm>
+            <a:off x="8222056" y="91440"/>
+            <a:ext cx="73152" cy="274320"/>
+          </a:xfrm>
+          <a:prstGeom prst="rect">
+            <a:avLst/>
+          </a:prstGeom>
+          <a:solidFill>
+            <a:srgbClr val="0369A1"/>
+          </a:solidFill>
+          <a:ln w="12700">
+            <a:solidFill>
+              <a:srgbClr val="0369A1"/>
+            </a:solidFill>
+            <a:prstDash val="solid"/>
+          </a:ln>
+        </p:spPr>
+      </p:sp>
+      <p:pic>
+        <p:nvPicPr>
+          <p:cNvPr id="16" name="Image 0" descr="preencoded.png">    </p:cNvPr>
+          <p:cNvPicPr>
+            <a:picLocks noChangeAspect="1"/>
+          </p:cNvPicPr>
+          <p:nvPr/>
+        </p:nvPicPr>
+        <p:blipFill>
+          <a:blip r:embed="rId1"/>
+          <a:stretch>
+            <a:fillRect/>
+          </a:stretch>
+        </p:blipFill>
+        <p:spPr>
+          <a:xfrm>
+            <a:off x="8350072" y="128016"/>
+            <a:ext cx="201168" cy="201168"/>
+          </a:xfrm>
+          <a:prstGeom prst="rect">
+            <a:avLst/>
+          </a:prstGeom>
+        </p:spPr>
+      </p:pic>
+      <p:sp>
+        <p:nvSpPr>
+          <p:cNvPr id="17" name="Text 14"/>
+          <p:cNvSpPr txBox="1"/>
+          <p:nvPr/>
+        </p:nvSpPr>
+        <p:spPr>
+          <a:xfrm>
+            <a:off x="8606104" y="91440"/>
+            <a:ext cx="3000375" cy="274320"/>
+          </a:xfrm>
+          <a:prstGeom prst="rect">
+            <a:avLst/>
+          </a:prstGeom>
+          <a:noFill/>
+          <a:ln/>
+        </p:spPr>
+        <p:txBody>
+          <a:bodyPr wrap="square" lIns="0" tIns="0" rIns="0" bIns="0" rtlCol="0" anchor="ctr"/>
+          <a:lstStyle/>
+          <a:p>
+            <a:pPr indent="0" marL="0">
+              <a:buNone/>
+            </a:pPr>
+            <a:r>
+              <a:rPr lang="en-US" sz="1100" b="1" dirty="0">
+                <a:solidFill>
+                  <a:srgbClr val="075985"/>
+                </a:solidFill>
+                <a:latin typeface="Calibri" pitchFamily="34" charset="0"/>
+                <a:ea typeface="Calibri" pitchFamily="34" charset="-122"/>
+                <a:cs typeface="Calibri" pitchFamily="34" charset="-120"/>
+              </a:rPr>
+              <a:t>UNDERSTAND NOW</a:t>
+            </a:r>
+            <a:pPr indent="0" marL="0">
+              <a:buNone/>
+            </a:pPr>
+            <a:r>
+              <a:rPr lang="en-US" sz="1100" dirty="0">
+                <a:solidFill>
+                  <a:srgbClr val="075985"/>
+                </a:solidFill>
+                <a:latin typeface="Calibri" pitchFamily="34" charset="0"/>
+                <a:ea typeface="Calibri" pitchFamily="34" charset="-122"/>
+                <a:cs typeface="Calibri" pitchFamily="34" charset="-120"/>
+              </a:rPr>
+              <a:t> · comparators and parity</a:t>
+            </a:r>
+            <a:endParaRPr lang="en-US" sz="1100" dirty="0"/>
+          </a:p>
+        </p:txBody>
+      </p:sp>
+      <p:sp>
+        <p:nvSpPr>
           <p:cNvPr id="25" name="Slide Number Placeholder 0"/>
           <p:cNvSpPr>
             <a:spLocks noGrp="1"/>
@@ -16347,6 +17540,133 @@
               <a:t>No memory anywhere: the ALU is one large combinational machine. Its slowest path, the carry chain of the adder, limits the clock of the processor.</a:t>
             </a:r>
             <a:endParaRPr lang="en-US" sz="1400" dirty="0"/>
+          </a:p>
+        </p:txBody>
+      </p:sp>
+      <p:sp>
+        <p:nvSpPr>
+          <p:cNvPr id="36" name="Shape 34"/>
+          <p:cNvSpPr/>
+          <p:nvPr/>
+        </p:nvSpPr>
+        <p:spPr>
+          <a:xfrm>
+            <a:off x="9206941" y="91440"/>
+            <a:ext cx="2436114" cy="274320"/>
+          </a:xfrm>
+          <a:prstGeom prst="rect">
+            <a:avLst/>
+          </a:prstGeom>
+          <a:solidFill>
+            <a:srgbClr val="E0F2FE"/>
+          </a:solidFill>
+          <a:ln w="12700">
+            <a:solidFill>
+              <a:srgbClr val="0369A1"/>
+            </a:solidFill>
+            <a:prstDash val="solid"/>
+          </a:ln>
+        </p:spPr>
+      </p:sp>
+      <p:sp>
+        <p:nvSpPr>
+          <p:cNvPr id="37" name="Shape 35"/>
+          <p:cNvSpPr/>
+          <p:nvPr/>
+        </p:nvSpPr>
+        <p:spPr>
+          <a:xfrm>
+            <a:off x="9206941" y="91440"/>
+            <a:ext cx="73152" cy="274320"/>
+          </a:xfrm>
+          <a:prstGeom prst="rect">
+            <a:avLst/>
+          </a:prstGeom>
+          <a:solidFill>
+            <a:srgbClr val="0369A1"/>
+          </a:solidFill>
+          <a:ln w="12700">
+            <a:solidFill>
+              <a:srgbClr val="0369A1"/>
+            </a:solidFill>
+            <a:prstDash val="solid"/>
+          </a:ln>
+        </p:spPr>
+      </p:sp>
+      <p:pic>
+        <p:nvPicPr>
+          <p:cNvPr id="38" name="Image 0" descr="preencoded.png">    </p:cNvPr>
+          <p:cNvPicPr>
+            <a:picLocks noChangeAspect="1"/>
+          </p:cNvPicPr>
+          <p:nvPr/>
+        </p:nvPicPr>
+        <p:blipFill>
+          <a:blip r:embed="rId1"/>
+          <a:stretch>
+            <a:fillRect/>
+          </a:stretch>
+        </p:blipFill>
+        <p:spPr>
+          <a:xfrm>
+            <a:off x="9334957" y="128016"/>
+            <a:ext cx="201168" cy="201168"/>
+          </a:xfrm>
+          <a:prstGeom prst="rect">
+            <a:avLst/>
+          </a:prstGeom>
+        </p:spPr>
+      </p:pic>
+      <p:sp>
+        <p:nvSpPr>
+          <p:cNvPr id="39" name="Text 36"/>
+          <p:cNvSpPr txBox="1"/>
+          <p:nvPr/>
+        </p:nvSpPr>
+        <p:spPr>
+          <a:xfrm>
+            <a:off x="9590989" y="91440"/>
+            <a:ext cx="2015490" cy="274320"/>
+          </a:xfrm>
+          <a:prstGeom prst="rect">
+            <a:avLst/>
+          </a:prstGeom>
+          <a:noFill/>
+          <a:ln/>
+        </p:spPr>
+        <p:txBody>
+          <a:bodyPr wrap="square" lIns="0" tIns="0" rIns="0" bIns="0" rtlCol="0" anchor="ctr"/>
+          <a:lstStyle/>
+          <a:p>
+            <a:pPr indent="0" marL="0">
+              <a:buNone/>
+            </a:pPr>
+            <a:r>
+              <a:rPr lang="en-US" sz="1100" b="1" dirty="0">
+                <a:solidFill>
+                  <a:srgbClr val="075985"/>
+                </a:solidFill>
+                <a:latin typeface="Calibri" pitchFamily="34" charset="0"/>
+                <a:ea typeface="Calibri" pitchFamily="34" charset="-122"/>
+                <a:cs typeface="Calibri" pitchFamily="34" charset="-120"/>
+              </a:rPr>
+              <a:t>UNDERSTAND NOW</a:t>
+            </a:r>
+            <a:pPr indent="0" marL="0">
+              <a:buNone/>
+            </a:pPr>
+            <a:r>
+              <a:rPr lang="en-US" sz="1100" dirty="0">
+                <a:solidFill>
+                  <a:srgbClr val="075985"/>
+                </a:solidFill>
+                <a:latin typeface="Calibri" pitchFamily="34" charset="0"/>
+                <a:ea typeface="Calibri" pitchFamily="34" charset="-122"/>
+                <a:cs typeface="Calibri" pitchFamily="34" charset="-120"/>
+              </a:rPr>
+              <a:t> · the ALU</a:t>
+            </a:r>
+            <a:endParaRPr lang="en-US" sz="1100" dirty="0"/>
           </a:p>
         </p:txBody>
       </p:sp>
@@ -22494,6 +23814,324 @@
       </p:sp>
       <p:sp>
         <p:nvSpPr>
+          <p:cNvPr id="9" name="Shape 7"/>
+          <p:cNvSpPr/>
+          <p:nvPr/>
+        </p:nvSpPr>
+        <p:spPr>
+          <a:xfrm>
+            <a:off x="7151954" y="91440"/>
+            <a:ext cx="4491101" cy="274320"/>
+          </a:xfrm>
+          <a:prstGeom prst="rect">
+            <a:avLst/>
+          </a:prstGeom>
+          <a:solidFill>
+            <a:srgbClr val="F3E8FF"/>
+          </a:solidFill>
+          <a:ln w="12700">
+            <a:solidFill>
+              <a:srgbClr val="7E22CE"/>
+            </a:solidFill>
+            <a:prstDash val="dash"/>
+          </a:ln>
+        </p:spPr>
+      </p:sp>
+      <p:sp>
+        <p:nvSpPr>
+          <p:cNvPr id="10" name="Shape 8"/>
+          <p:cNvSpPr/>
+          <p:nvPr/>
+        </p:nvSpPr>
+        <p:spPr>
+          <a:xfrm>
+            <a:off x="7179386" y="128016"/>
+            <a:ext cx="45720" cy="45720"/>
+          </a:xfrm>
+          <a:prstGeom prst="rect">
+            <a:avLst/>
+          </a:prstGeom>
+          <a:solidFill>
+            <a:srgbClr val="7E22CE"/>
+          </a:solidFill>
+          <a:ln w="12700">
+            <a:solidFill>
+              <a:srgbClr val="7E22CE"/>
+            </a:solidFill>
+            <a:prstDash val="solid"/>
+          </a:ln>
+        </p:spPr>
+      </p:sp>
+      <p:sp>
+        <p:nvSpPr>
+          <p:cNvPr id="11" name="Shape 9"/>
+          <p:cNvSpPr/>
+          <p:nvPr/>
+        </p:nvSpPr>
+        <p:spPr>
+          <a:xfrm>
+            <a:off x="7179386" y="205740"/>
+            <a:ext cx="45720" cy="45720"/>
+          </a:xfrm>
+          <a:prstGeom prst="rect">
+            <a:avLst/>
+          </a:prstGeom>
+          <a:solidFill>
+            <a:srgbClr val="7E22CE"/>
+          </a:solidFill>
+          <a:ln w="12700">
+            <a:solidFill>
+              <a:srgbClr val="7E22CE"/>
+            </a:solidFill>
+            <a:prstDash val="solid"/>
+          </a:ln>
+        </p:spPr>
+      </p:sp>
+      <p:sp>
+        <p:nvSpPr>
+          <p:cNvPr id="12" name="Shape 10"/>
+          <p:cNvSpPr/>
+          <p:nvPr/>
+        </p:nvSpPr>
+        <p:spPr>
+          <a:xfrm>
+            <a:off x="7179386" y="283464"/>
+            <a:ext cx="45720" cy="45720"/>
+          </a:xfrm>
+          <a:prstGeom prst="rect">
+            <a:avLst/>
+          </a:prstGeom>
+          <a:solidFill>
+            <a:srgbClr val="7E22CE"/>
+          </a:solidFill>
+          <a:ln w="12700">
+            <a:solidFill>
+              <a:srgbClr val="7E22CE"/>
+            </a:solidFill>
+            <a:prstDash val="solid"/>
+          </a:ln>
+        </p:spPr>
+      </p:sp>
+      <p:pic>
+        <p:nvPicPr>
+          <p:cNvPr id="13" name="Image 0" descr="preencoded.png">    </p:cNvPr>
+          <p:cNvPicPr>
+            <a:picLocks noChangeAspect="1"/>
+          </p:cNvPicPr>
+          <p:nvPr/>
+        </p:nvPicPr>
+        <p:blipFill>
+          <a:blip r:embed="rId1"/>
+          <a:stretch>
+            <a:fillRect/>
+          </a:stretch>
+        </p:blipFill>
+        <p:spPr>
+          <a:xfrm>
+            <a:off x="7279970" y="128016"/>
+            <a:ext cx="201168" cy="201168"/>
+          </a:xfrm>
+          <a:prstGeom prst="rect">
+            <a:avLst/>
+          </a:prstGeom>
+        </p:spPr>
+      </p:pic>
+      <p:sp>
+        <p:nvSpPr>
+          <p:cNvPr id="14" name="Text 11"/>
+          <p:cNvSpPr txBox="1"/>
+          <p:nvPr/>
+        </p:nvSpPr>
+        <p:spPr>
+          <a:xfrm>
+            <a:off x="7536002" y="91440"/>
+            <a:ext cx="4070477" cy="274320"/>
+          </a:xfrm>
+          <a:prstGeom prst="rect">
+            <a:avLst/>
+          </a:prstGeom>
+          <a:noFill/>
+          <a:ln/>
+        </p:spPr>
+        <p:txBody>
+          <a:bodyPr wrap="square" lIns="0" tIns="0" rIns="0" bIns="0" rtlCol="0" anchor="ctr"/>
+          <a:lstStyle/>
+          <a:p>
+            <a:pPr indent="0" marL="0">
+              <a:buNone/>
+            </a:pPr>
+            <a:r>
+              <a:rPr lang="en-US" sz="1100" b="1" dirty="0">
+                <a:solidFill>
+                  <a:srgbClr val="6B21A8"/>
+                </a:solidFill>
+                <a:latin typeface="Calibri" pitchFamily="34" charset="0"/>
+                <a:ea typeface="Calibri" pitchFamily="34" charset="-122"/>
+                <a:cs typeface="Calibri" pitchFamily="34" charset="-120"/>
+              </a:rPr>
+              <a:t>UNDERSTAND LATER</a:t>
+            </a:r>
+            <a:pPr indent="0" marL="0">
+              <a:buNone/>
+            </a:pPr>
+            <a:r>
+              <a:rPr lang="en-US" sz="1100" dirty="0">
+                <a:solidFill>
+                  <a:srgbClr val="6B21A8"/>
+                </a:solidFill>
+                <a:latin typeface="Calibri" pitchFamily="34" charset="0"/>
+                <a:ea typeface="Calibri" pitchFamily="34" charset="-122"/>
+                <a:cs typeface="Calibri" pitchFamily="34" charset="-120"/>
+              </a:rPr>
+              <a:t> · finite-state machines</a:t>
+            </a:r>
+            <a:pPr indent="0" marL="0">
+              <a:buNone/>
+            </a:pPr>
+            <a:r>
+              <a:rPr lang="en-US" sz="1100" b="1" dirty="0">
+                <a:solidFill>
+                  <a:srgbClr val="6B21A8"/>
+                </a:solidFill>
+                <a:latin typeface="Calibri" pitchFamily="34" charset="0"/>
+                <a:ea typeface="Calibri" pitchFamily="34" charset="-122"/>
+                <a:cs typeface="Calibri" pitchFamily="34" charset="-120"/>
+              </a:rPr>
+              <a:t> → Lecture 13</a:t>
+            </a:r>
+            <a:endParaRPr lang="en-US" sz="1100" dirty="0"/>
+          </a:p>
+        </p:txBody>
+      </p:sp>
+      <p:sp>
+        <p:nvSpPr>
+          <p:cNvPr id="15" name="Shape 12"/>
+          <p:cNvSpPr/>
+          <p:nvPr/>
+        </p:nvSpPr>
+        <p:spPr>
+          <a:xfrm>
+            <a:off x="3621227" y="91440"/>
+            <a:ext cx="3420999" cy="274320"/>
+          </a:xfrm>
+          <a:prstGeom prst="rect">
+            <a:avLst/>
+          </a:prstGeom>
+          <a:solidFill>
+            <a:srgbClr val="E0F2FE"/>
+          </a:solidFill>
+          <a:ln w="12700">
+            <a:solidFill>
+              <a:srgbClr val="0369A1"/>
+            </a:solidFill>
+            <a:prstDash val="solid"/>
+          </a:ln>
+        </p:spPr>
+      </p:sp>
+      <p:sp>
+        <p:nvSpPr>
+          <p:cNvPr id="16" name="Shape 13"/>
+          <p:cNvSpPr/>
+          <p:nvPr/>
+        </p:nvSpPr>
+        <p:spPr>
+          <a:xfrm>
+            <a:off x="3621227" y="91440"/>
+            <a:ext cx="73152" cy="274320"/>
+          </a:xfrm>
+          <a:prstGeom prst="rect">
+            <a:avLst/>
+          </a:prstGeom>
+          <a:solidFill>
+            <a:srgbClr val="0369A1"/>
+          </a:solidFill>
+          <a:ln w="12700">
+            <a:solidFill>
+              <a:srgbClr val="0369A1"/>
+            </a:solidFill>
+            <a:prstDash val="solid"/>
+          </a:ln>
+        </p:spPr>
+      </p:sp>
+      <p:pic>
+        <p:nvPicPr>
+          <p:cNvPr id="17" name="Image 1" descr="preencoded.png">    </p:cNvPr>
+          <p:cNvPicPr>
+            <a:picLocks noChangeAspect="1"/>
+          </p:cNvPicPr>
+          <p:nvPr/>
+        </p:nvPicPr>
+        <p:blipFill>
+          <a:blip r:embed="rId2"/>
+          <a:stretch>
+            <a:fillRect/>
+          </a:stretch>
+        </p:blipFill>
+        <p:spPr>
+          <a:xfrm>
+            <a:off x="3749243" y="128016"/>
+            <a:ext cx="201168" cy="201168"/>
+          </a:xfrm>
+          <a:prstGeom prst="rect">
+            <a:avLst/>
+          </a:prstGeom>
+        </p:spPr>
+      </p:pic>
+      <p:sp>
+        <p:nvSpPr>
+          <p:cNvPr id="18" name="Text 14"/>
+          <p:cNvSpPr txBox="1"/>
+          <p:nvPr/>
+        </p:nvSpPr>
+        <p:spPr>
+          <a:xfrm>
+            <a:off x="4005275" y="91440"/>
+            <a:ext cx="3000375" cy="274320"/>
+          </a:xfrm>
+          <a:prstGeom prst="rect">
+            <a:avLst/>
+          </a:prstGeom>
+          <a:noFill/>
+          <a:ln/>
+        </p:spPr>
+        <p:txBody>
+          <a:bodyPr wrap="square" lIns="0" tIns="0" rIns="0" bIns="0" rtlCol="0" anchor="ctr"/>
+          <a:lstStyle/>
+          <a:p>
+            <a:pPr indent="0" marL="0">
+              <a:buNone/>
+            </a:pPr>
+            <a:r>
+              <a:rPr lang="en-US" sz="1100" b="1" dirty="0">
+                <a:solidFill>
+                  <a:srgbClr val="075985"/>
+                </a:solidFill>
+                <a:latin typeface="Calibri" pitchFamily="34" charset="0"/>
+                <a:ea typeface="Calibri" pitchFamily="34" charset="-122"/>
+                <a:cs typeface="Calibri" pitchFamily="34" charset="-120"/>
+              </a:rPr>
+              <a:t>UNDERSTAND NOW</a:t>
+            </a:r>
+            <a:pPr indent="0" marL="0">
+              <a:buNone/>
+            </a:pPr>
+            <a:r>
+              <a:rPr lang="en-US" sz="1100" dirty="0">
+                <a:solidFill>
+                  <a:srgbClr val="075985"/>
+                </a:solidFill>
+                <a:latin typeface="Calibri" pitchFamily="34" charset="0"/>
+                <a:ea typeface="Calibri" pitchFamily="34" charset="-122"/>
+                <a:cs typeface="Calibri" pitchFamily="34" charset="-120"/>
+              </a:rPr>
+              <a:t> · combinational machines</a:t>
+            </a:r>
+            <a:endParaRPr lang="en-US" sz="1100" dirty="0"/>
+          </a:p>
+        </p:txBody>
+      </p:sp>
+      <p:sp>
+        <p:nvSpPr>
           <p:cNvPr id="25" name="Slide Number Placeholder 0"/>
           <p:cNvSpPr>
             <a:spLocks noGrp="1"/>
@@ -23048,6 +24686,133 @@
       </p:sp>
       <p:sp>
         <p:nvSpPr>
+          <p:cNvPr id="16" name="Shape 14"/>
+          <p:cNvSpPr/>
+          <p:nvPr/>
+        </p:nvSpPr>
+        <p:spPr>
+          <a:xfrm>
+            <a:off x="8222056" y="91440"/>
+            <a:ext cx="3420999" cy="274320"/>
+          </a:xfrm>
+          <a:prstGeom prst="rect">
+            <a:avLst/>
+          </a:prstGeom>
+          <a:solidFill>
+            <a:srgbClr val="E0F2FE"/>
+          </a:solidFill>
+          <a:ln w="12700">
+            <a:solidFill>
+              <a:srgbClr val="0369A1"/>
+            </a:solidFill>
+            <a:prstDash val="solid"/>
+          </a:ln>
+        </p:spPr>
+      </p:sp>
+      <p:sp>
+        <p:nvSpPr>
+          <p:cNvPr id="17" name="Shape 15"/>
+          <p:cNvSpPr/>
+          <p:nvPr/>
+        </p:nvSpPr>
+        <p:spPr>
+          <a:xfrm>
+            <a:off x="8222056" y="91440"/>
+            <a:ext cx="73152" cy="274320"/>
+          </a:xfrm>
+          <a:prstGeom prst="rect">
+            <a:avLst/>
+          </a:prstGeom>
+          <a:solidFill>
+            <a:srgbClr val="0369A1"/>
+          </a:solidFill>
+          <a:ln w="12700">
+            <a:solidFill>
+              <a:srgbClr val="0369A1"/>
+            </a:solidFill>
+            <a:prstDash val="solid"/>
+          </a:ln>
+        </p:spPr>
+      </p:sp>
+      <p:pic>
+        <p:nvPicPr>
+          <p:cNvPr id="18" name="Image 0" descr="preencoded.png">    </p:cNvPr>
+          <p:cNvPicPr>
+            <a:picLocks noChangeAspect="1"/>
+          </p:cNvPicPr>
+          <p:nvPr/>
+        </p:nvPicPr>
+        <p:blipFill>
+          <a:blip r:embed="rId1"/>
+          <a:stretch>
+            <a:fillRect/>
+          </a:stretch>
+        </p:blipFill>
+        <p:spPr>
+          <a:xfrm>
+            <a:off x="8350072" y="128016"/>
+            <a:ext cx="201168" cy="201168"/>
+          </a:xfrm>
+          <a:prstGeom prst="rect">
+            <a:avLst/>
+          </a:prstGeom>
+        </p:spPr>
+      </p:pic>
+      <p:sp>
+        <p:nvSpPr>
+          <p:cNvPr id="19" name="Text 16"/>
+          <p:cNvSpPr txBox="1"/>
+          <p:nvPr/>
+        </p:nvSpPr>
+        <p:spPr>
+          <a:xfrm>
+            <a:off x="8606104" y="91440"/>
+            <a:ext cx="3000375" cy="274320"/>
+          </a:xfrm>
+          <a:prstGeom prst="rect">
+            <a:avLst/>
+          </a:prstGeom>
+          <a:noFill/>
+          <a:ln/>
+        </p:spPr>
+        <p:txBody>
+          <a:bodyPr wrap="square" lIns="0" tIns="0" rIns="0" bIns="0" rtlCol="0" anchor="ctr"/>
+          <a:lstStyle/>
+          <a:p>
+            <a:pPr indent="0" marL="0">
+              <a:buNone/>
+            </a:pPr>
+            <a:r>
+              <a:rPr lang="en-US" sz="1100" b="1" dirty="0">
+                <a:solidFill>
+                  <a:srgbClr val="075985"/>
+                </a:solidFill>
+                <a:latin typeface="Calibri" pitchFamily="34" charset="0"/>
+                <a:ea typeface="Calibri" pitchFamily="34" charset="-122"/>
+                <a:cs typeface="Calibri" pitchFamily="34" charset="-120"/>
+              </a:rPr>
+              <a:t>UNDERSTAND NOW</a:t>
+            </a:r>
+            <a:pPr indent="0" marL="0">
+              <a:buNone/>
+            </a:pPr>
+            <a:r>
+              <a:rPr lang="en-US" sz="1100" dirty="0">
+                <a:solidFill>
+                  <a:srgbClr val="075985"/>
+                </a:solidFill>
+                <a:latin typeface="Calibri" pitchFamily="34" charset="0"/>
+                <a:ea typeface="Calibri" pitchFamily="34" charset="-122"/>
+                <a:cs typeface="Calibri" pitchFamily="34" charset="-120"/>
+              </a:rPr>
+              <a:t> · combinational machines</a:t>
+            </a:r>
+            <a:endParaRPr lang="en-US" sz="1100" dirty="0"/>
+          </a:p>
+        </p:txBody>
+      </p:sp>
+      <p:sp>
+        <p:nvSpPr>
           <p:cNvPr id="25" name="Slide Number Placeholder 0"/>
           <p:cNvSpPr>
             <a:spLocks noGrp="1"/>
@@ -23530,6 +25295,133 @@
               <a:t>Incomplete code: N is not a power of k, and k^m - N words are left unassigned</a:t>
             </a:r>
             <a:endParaRPr lang="en-US" sz="2100" dirty="0"/>
+          </a:p>
+        </p:txBody>
+      </p:sp>
+      <p:sp>
+        <p:nvSpPr>
+          <p:cNvPr id="14" name="Shape 12"/>
+          <p:cNvSpPr/>
+          <p:nvPr/>
+        </p:nvSpPr>
+        <p:spPr>
+          <a:xfrm>
+            <a:off x="9338259" y="91440"/>
+            <a:ext cx="2304796" cy="274320"/>
+          </a:xfrm>
+          <a:prstGeom prst="rect">
+            <a:avLst/>
+          </a:prstGeom>
+          <a:solidFill>
+            <a:srgbClr val="E0F2FE"/>
+          </a:solidFill>
+          <a:ln w="12700">
+            <a:solidFill>
+              <a:srgbClr val="0369A1"/>
+            </a:solidFill>
+            <a:prstDash val="solid"/>
+          </a:ln>
+        </p:spPr>
+      </p:sp>
+      <p:sp>
+        <p:nvSpPr>
+          <p:cNvPr id="15" name="Shape 13"/>
+          <p:cNvSpPr/>
+          <p:nvPr/>
+        </p:nvSpPr>
+        <p:spPr>
+          <a:xfrm>
+            <a:off x="9338259" y="91440"/>
+            <a:ext cx="73152" cy="274320"/>
+          </a:xfrm>
+          <a:prstGeom prst="rect">
+            <a:avLst/>
+          </a:prstGeom>
+          <a:solidFill>
+            <a:srgbClr val="0369A1"/>
+          </a:solidFill>
+          <a:ln w="12700">
+            <a:solidFill>
+              <a:srgbClr val="0369A1"/>
+            </a:solidFill>
+            <a:prstDash val="solid"/>
+          </a:ln>
+        </p:spPr>
+      </p:sp>
+      <p:pic>
+        <p:nvPicPr>
+          <p:cNvPr id="16" name="Image 0" descr="preencoded.png">    </p:cNvPr>
+          <p:cNvPicPr>
+            <a:picLocks noChangeAspect="1"/>
+          </p:cNvPicPr>
+          <p:nvPr/>
+        </p:nvPicPr>
+        <p:blipFill>
+          <a:blip r:embed="rId1"/>
+          <a:stretch>
+            <a:fillRect/>
+          </a:stretch>
+        </p:blipFill>
+        <p:spPr>
+          <a:xfrm>
+            <a:off x="9466275" y="128016"/>
+            <a:ext cx="201168" cy="201168"/>
+          </a:xfrm>
+          <a:prstGeom prst="rect">
+            <a:avLst/>
+          </a:prstGeom>
+        </p:spPr>
+      </p:pic>
+      <p:sp>
+        <p:nvSpPr>
+          <p:cNvPr id="17" name="Text 14"/>
+          <p:cNvSpPr txBox="1"/>
+          <p:nvPr/>
+        </p:nvSpPr>
+        <p:spPr>
+          <a:xfrm>
+            <a:off x="9722307" y="91440"/>
+            <a:ext cx="1884172" cy="274320"/>
+          </a:xfrm>
+          <a:prstGeom prst="rect">
+            <a:avLst/>
+          </a:prstGeom>
+          <a:noFill/>
+          <a:ln/>
+        </p:spPr>
+        <p:txBody>
+          <a:bodyPr wrap="square" lIns="0" tIns="0" rIns="0" bIns="0" rtlCol="0" anchor="ctr"/>
+          <a:lstStyle/>
+          <a:p>
+            <a:pPr indent="0" marL="0">
+              <a:buNone/>
+            </a:pPr>
+            <a:r>
+              <a:rPr lang="en-US" sz="1100" b="1" dirty="0">
+                <a:solidFill>
+                  <a:srgbClr val="075985"/>
+                </a:solidFill>
+                <a:latin typeface="Calibri" pitchFamily="34" charset="0"/>
+                <a:ea typeface="Calibri" pitchFamily="34" charset="-122"/>
+                <a:cs typeface="Calibri" pitchFamily="34" charset="-120"/>
+              </a:rPr>
+              <a:t>UNDERSTAND NOW</a:t>
+            </a:r>
+            <a:pPr indent="0" marL="0">
+              <a:buNone/>
+            </a:pPr>
+            <a:r>
+              <a:rPr lang="en-US" sz="1100" dirty="0">
+                <a:solidFill>
+                  <a:srgbClr val="075985"/>
+                </a:solidFill>
+                <a:latin typeface="Calibri" pitchFamily="34" charset="0"/>
+                <a:ea typeface="Calibri" pitchFamily="34" charset="-122"/>
+                <a:cs typeface="Calibri" pitchFamily="34" charset="-120"/>
+              </a:rPr>
+              <a:t> · codes</a:t>
+            </a:r>
+            <a:endParaRPr lang="en-US" sz="1100" dirty="0"/>
           </a:p>
         </p:txBody>
       </p:sp>
@@ -26182,6 +28074,133 @@
       </p:sp>
       <p:sp>
         <p:nvSpPr>
+          <p:cNvPr id="5" name="Shape 2"/>
+          <p:cNvSpPr/>
+          <p:nvPr/>
+        </p:nvSpPr>
+        <p:spPr>
+          <a:xfrm>
+            <a:off x="9338259" y="91440"/>
+            <a:ext cx="2304796" cy="274320"/>
+          </a:xfrm>
+          <a:prstGeom prst="rect">
+            <a:avLst/>
+          </a:prstGeom>
+          <a:solidFill>
+            <a:srgbClr val="E0F2FE"/>
+          </a:solidFill>
+          <a:ln w="12700">
+            <a:solidFill>
+              <a:srgbClr val="0369A1"/>
+            </a:solidFill>
+            <a:prstDash val="solid"/>
+          </a:ln>
+        </p:spPr>
+      </p:sp>
+      <p:sp>
+        <p:nvSpPr>
+          <p:cNvPr id="6" name="Shape 3"/>
+          <p:cNvSpPr/>
+          <p:nvPr/>
+        </p:nvSpPr>
+        <p:spPr>
+          <a:xfrm>
+            <a:off x="9338259" y="91440"/>
+            <a:ext cx="73152" cy="274320"/>
+          </a:xfrm>
+          <a:prstGeom prst="rect">
+            <a:avLst/>
+          </a:prstGeom>
+          <a:solidFill>
+            <a:srgbClr val="0369A1"/>
+          </a:solidFill>
+          <a:ln w="12700">
+            <a:solidFill>
+              <a:srgbClr val="0369A1"/>
+            </a:solidFill>
+            <a:prstDash val="solid"/>
+          </a:ln>
+        </p:spPr>
+      </p:sp>
+      <p:pic>
+        <p:nvPicPr>
+          <p:cNvPr id="7" name="Image 0" descr="preencoded.png">    </p:cNvPr>
+          <p:cNvPicPr>
+            <a:picLocks noChangeAspect="1"/>
+          </p:cNvPicPr>
+          <p:nvPr/>
+        </p:nvPicPr>
+        <p:blipFill>
+          <a:blip r:embed="rId1"/>
+          <a:stretch>
+            <a:fillRect/>
+          </a:stretch>
+        </p:blipFill>
+        <p:spPr>
+          <a:xfrm>
+            <a:off x="9466275" y="128016"/>
+            <a:ext cx="201168" cy="201168"/>
+          </a:xfrm>
+          <a:prstGeom prst="rect">
+            <a:avLst/>
+          </a:prstGeom>
+        </p:spPr>
+      </p:pic>
+      <p:sp>
+        <p:nvSpPr>
+          <p:cNvPr id="8" name="Text 4"/>
+          <p:cNvSpPr txBox="1"/>
+          <p:nvPr/>
+        </p:nvSpPr>
+        <p:spPr>
+          <a:xfrm>
+            <a:off x="9722307" y="91440"/>
+            <a:ext cx="1884172" cy="274320"/>
+          </a:xfrm>
+          <a:prstGeom prst="rect">
+            <a:avLst/>
+          </a:prstGeom>
+          <a:noFill/>
+          <a:ln/>
+        </p:spPr>
+        <p:txBody>
+          <a:bodyPr wrap="square" lIns="0" tIns="0" rIns="0" bIns="0" rtlCol="0" anchor="ctr"/>
+          <a:lstStyle/>
+          <a:p>
+            <a:pPr indent="0" marL="0">
+              <a:buNone/>
+            </a:pPr>
+            <a:r>
+              <a:rPr lang="en-US" sz="1100" b="1" dirty="0">
+                <a:solidFill>
+                  <a:srgbClr val="075985"/>
+                </a:solidFill>
+                <a:latin typeface="Calibri" pitchFamily="34" charset="0"/>
+                <a:ea typeface="Calibri" pitchFamily="34" charset="-122"/>
+                <a:cs typeface="Calibri" pitchFamily="34" charset="-120"/>
+              </a:rPr>
+              <a:t>UNDERSTAND NOW</a:t>
+            </a:r>
+            <a:pPr indent="0" marL="0">
+              <a:buNone/>
+            </a:pPr>
+            <a:r>
+              <a:rPr lang="en-US" sz="1100" dirty="0">
+                <a:solidFill>
+                  <a:srgbClr val="075985"/>
+                </a:solidFill>
+                <a:latin typeface="Calibri" pitchFamily="34" charset="0"/>
+                <a:ea typeface="Calibri" pitchFamily="34" charset="-122"/>
+                <a:cs typeface="Calibri" pitchFamily="34" charset="-120"/>
+              </a:rPr>
+              <a:t> · codes</a:t>
+            </a:r>
+            <a:endParaRPr lang="en-US" sz="1100" dirty="0"/>
+          </a:p>
+        </p:txBody>
+      </p:sp>
+      <p:sp>
+        <p:nvSpPr>
           <p:cNvPr id="25" name="Slide Number Placeholder 0"/>
           <p:cNvSpPr>
             <a:spLocks noGrp="1"/>
@@ -27708,6 +29727,133 @@
       </p:sp>
       <p:sp>
         <p:nvSpPr>
+          <p:cNvPr id="14" name="Shape 11"/>
+          <p:cNvSpPr/>
+          <p:nvPr/>
+        </p:nvSpPr>
+        <p:spPr>
+          <a:xfrm>
+            <a:off x="9338259" y="91440"/>
+            <a:ext cx="2304796" cy="274320"/>
+          </a:xfrm>
+          <a:prstGeom prst="rect">
+            <a:avLst/>
+          </a:prstGeom>
+          <a:solidFill>
+            <a:srgbClr val="E0F2FE"/>
+          </a:solidFill>
+          <a:ln w="12700">
+            <a:solidFill>
+              <a:srgbClr val="0369A1"/>
+            </a:solidFill>
+            <a:prstDash val="solid"/>
+          </a:ln>
+        </p:spPr>
+      </p:sp>
+      <p:sp>
+        <p:nvSpPr>
+          <p:cNvPr id="15" name="Shape 12"/>
+          <p:cNvSpPr/>
+          <p:nvPr/>
+        </p:nvSpPr>
+        <p:spPr>
+          <a:xfrm>
+            <a:off x="9338259" y="91440"/>
+            <a:ext cx="73152" cy="274320"/>
+          </a:xfrm>
+          <a:prstGeom prst="rect">
+            <a:avLst/>
+          </a:prstGeom>
+          <a:solidFill>
+            <a:srgbClr val="0369A1"/>
+          </a:solidFill>
+          <a:ln w="12700">
+            <a:solidFill>
+              <a:srgbClr val="0369A1"/>
+            </a:solidFill>
+            <a:prstDash val="solid"/>
+          </a:ln>
+        </p:spPr>
+      </p:sp>
+      <p:pic>
+        <p:nvPicPr>
+          <p:cNvPr id="16" name="Image 0" descr="preencoded.png">    </p:cNvPr>
+          <p:cNvPicPr>
+            <a:picLocks noChangeAspect="1"/>
+          </p:cNvPicPr>
+          <p:nvPr/>
+        </p:nvPicPr>
+        <p:blipFill>
+          <a:blip r:embed="rId1"/>
+          <a:stretch>
+            <a:fillRect/>
+          </a:stretch>
+        </p:blipFill>
+        <p:spPr>
+          <a:xfrm>
+            <a:off x="9466275" y="128016"/>
+            <a:ext cx="201168" cy="201168"/>
+          </a:xfrm>
+          <a:prstGeom prst="rect">
+            <a:avLst/>
+          </a:prstGeom>
+        </p:spPr>
+      </p:pic>
+      <p:sp>
+        <p:nvSpPr>
+          <p:cNvPr id="17" name="Text 13"/>
+          <p:cNvSpPr txBox="1"/>
+          <p:nvPr/>
+        </p:nvSpPr>
+        <p:spPr>
+          <a:xfrm>
+            <a:off x="9722307" y="91440"/>
+            <a:ext cx="1884172" cy="274320"/>
+          </a:xfrm>
+          <a:prstGeom prst="rect">
+            <a:avLst/>
+          </a:prstGeom>
+          <a:noFill/>
+          <a:ln/>
+        </p:spPr>
+        <p:txBody>
+          <a:bodyPr wrap="square" lIns="0" tIns="0" rIns="0" bIns="0" rtlCol="0" anchor="ctr"/>
+          <a:lstStyle/>
+          <a:p>
+            <a:pPr indent="0" marL="0">
+              <a:buNone/>
+            </a:pPr>
+            <a:r>
+              <a:rPr lang="en-US" sz="1100" b="1" dirty="0">
+                <a:solidFill>
+                  <a:srgbClr val="075985"/>
+                </a:solidFill>
+                <a:latin typeface="Calibri" pitchFamily="34" charset="0"/>
+                <a:ea typeface="Calibri" pitchFamily="34" charset="-122"/>
+                <a:cs typeface="Calibri" pitchFamily="34" charset="-120"/>
+              </a:rPr>
+              <a:t>UNDERSTAND NOW</a:t>
+            </a:r>
+            <a:pPr indent="0" marL="0">
+              <a:buNone/>
+            </a:pPr>
+            <a:r>
+              <a:rPr lang="en-US" sz="1100" dirty="0">
+                <a:solidFill>
+                  <a:srgbClr val="075985"/>
+                </a:solidFill>
+                <a:latin typeface="Calibri" pitchFamily="34" charset="0"/>
+                <a:ea typeface="Calibri" pitchFamily="34" charset="-122"/>
+                <a:cs typeface="Calibri" pitchFamily="34" charset="-120"/>
+              </a:rPr>
+              <a:t> · codes</a:t>
+            </a:r>
+            <a:endParaRPr lang="en-US" sz="1100" dirty="0"/>
+          </a:p>
+        </p:txBody>
+      </p:sp>
+      <p:sp>
+        <p:nvSpPr>
           <p:cNvPr id="25" name="Slide Number Placeholder 0"/>
           <p:cNvSpPr>
             <a:spLocks noGrp="1"/>
@@ -28190,6 +30336,133 @@
               <a:t>one of four: the third line is asserted, so the third element is the one chosen</a:t>
             </a:r>
             <a:endParaRPr lang="en-US" sz="1900" dirty="0"/>
+          </a:p>
+        </p:txBody>
+      </p:sp>
+      <p:sp>
+        <p:nvSpPr>
+          <p:cNvPr id="14" name="Shape 12"/>
+          <p:cNvSpPr/>
+          <p:nvPr/>
+        </p:nvSpPr>
+        <p:spPr>
+          <a:xfrm>
+            <a:off x="8287715" y="91440"/>
+            <a:ext cx="3355340" cy="274320"/>
+          </a:xfrm>
+          <a:prstGeom prst="rect">
+            <a:avLst/>
+          </a:prstGeom>
+          <a:solidFill>
+            <a:srgbClr val="E0F2FE"/>
+          </a:solidFill>
+          <a:ln w="12700">
+            <a:solidFill>
+              <a:srgbClr val="0369A1"/>
+            </a:solidFill>
+            <a:prstDash val="solid"/>
+          </a:ln>
+        </p:spPr>
+      </p:sp>
+      <p:sp>
+        <p:nvSpPr>
+          <p:cNvPr id="15" name="Shape 13"/>
+          <p:cNvSpPr/>
+          <p:nvPr/>
+        </p:nvSpPr>
+        <p:spPr>
+          <a:xfrm>
+            <a:off x="8287715" y="91440"/>
+            <a:ext cx="73152" cy="274320"/>
+          </a:xfrm>
+          <a:prstGeom prst="rect">
+            <a:avLst/>
+          </a:prstGeom>
+          <a:solidFill>
+            <a:srgbClr val="0369A1"/>
+          </a:solidFill>
+          <a:ln w="12700">
+            <a:solidFill>
+              <a:srgbClr val="0369A1"/>
+            </a:solidFill>
+            <a:prstDash val="solid"/>
+          </a:ln>
+        </p:spPr>
+      </p:sp>
+      <p:pic>
+        <p:nvPicPr>
+          <p:cNvPr id="16" name="Image 0" descr="preencoded.png">    </p:cNvPr>
+          <p:cNvPicPr>
+            <a:picLocks noChangeAspect="1"/>
+          </p:cNvPicPr>
+          <p:nvPr/>
+        </p:nvPicPr>
+        <p:blipFill>
+          <a:blip r:embed="rId1"/>
+          <a:stretch>
+            <a:fillRect/>
+          </a:stretch>
+        </p:blipFill>
+        <p:spPr>
+          <a:xfrm>
+            <a:off x="8415731" y="128016"/>
+            <a:ext cx="201168" cy="201168"/>
+          </a:xfrm>
+          <a:prstGeom prst="rect">
+            <a:avLst/>
+          </a:prstGeom>
+        </p:spPr>
+      </p:pic>
+      <p:sp>
+        <p:nvSpPr>
+          <p:cNvPr id="17" name="Text 14"/>
+          <p:cNvSpPr txBox="1"/>
+          <p:nvPr/>
+        </p:nvSpPr>
+        <p:spPr>
+          <a:xfrm>
+            <a:off x="8671763" y="91440"/>
+            <a:ext cx="2934716" cy="274320"/>
+          </a:xfrm>
+          <a:prstGeom prst="rect">
+            <a:avLst/>
+          </a:prstGeom>
+          <a:noFill/>
+          <a:ln/>
+        </p:spPr>
+        <p:txBody>
+          <a:bodyPr wrap="square" lIns="0" tIns="0" rIns="0" bIns="0" rtlCol="0" anchor="ctr"/>
+          <a:lstStyle/>
+          <a:p>
+            <a:pPr indent="0" marL="0">
+              <a:buNone/>
+            </a:pPr>
+            <a:r>
+              <a:rPr lang="en-US" sz="1100" b="1" dirty="0">
+                <a:solidFill>
+                  <a:srgbClr val="075985"/>
+                </a:solidFill>
+                <a:latin typeface="Calibri" pitchFamily="34" charset="0"/>
+                <a:ea typeface="Calibri" pitchFamily="34" charset="-122"/>
+                <a:cs typeface="Calibri" pitchFamily="34" charset="-120"/>
+              </a:rPr>
+              <a:t>UNDERSTAND NOW</a:t>
+            </a:r>
+            <a:pPr indent="0" marL="0">
+              <a:buNone/>
+            </a:pPr>
+            <a:r>
+              <a:rPr lang="en-US" sz="1100" dirty="0">
+                <a:solidFill>
+                  <a:srgbClr val="075985"/>
+                </a:solidFill>
+                <a:latin typeface="Calibri" pitchFamily="34" charset="0"/>
+                <a:ea typeface="Calibri" pitchFamily="34" charset="-122"/>
+                <a:cs typeface="Calibri" pitchFamily="34" charset="-120"/>
+              </a:rPr>
+              <a:t> · decoders and encoders</a:t>
+            </a:r>
+            <a:endParaRPr lang="en-US" sz="1100" dirty="0"/>
           </a:p>
         </p:txBody>
       </p:sp>
@@ -30709,9 +32982,59 @@
           </a:ln>
         </p:spPr>
       </p:sp>
+      <p:sp>
+        <p:nvSpPr>
+          <p:cNvPr id="12" name="Shape 9"/>
+          <p:cNvSpPr/>
+          <p:nvPr/>
+        </p:nvSpPr>
+        <p:spPr>
+          <a:xfrm>
+            <a:off x="8287715" y="91440"/>
+            <a:ext cx="3355340" cy="274320"/>
+          </a:xfrm>
+          <a:prstGeom prst="rect">
+            <a:avLst/>
+          </a:prstGeom>
+          <a:solidFill>
+            <a:srgbClr val="E0F2FE"/>
+          </a:solidFill>
+          <a:ln w="12700">
+            <a:solidFill>
+              <a:srgbClr val="0369A1"/>
+            </a:solidFill>
+            <a:prstDash val="solid"/>
+          </a:ln>
+        </p:spPr>
+      </p:sp>
+      <p:sp>
+        <p:nvSpPr>
+          <p:cNvPr id="13" name="Shape 10"/>
+          <p:cNvSpPr/>
+          <p:nvPr/>
+        </p:nvSpPr>
+        <p:spPr>
+          <a:xfrm>
+            <a:off x="8287715" y="91440"/>
+            <a:ext cx="73152" cy="274320"/>
+          </a:xfrm>
+          <a:prstGeom prst="rect">
+            <a:avLst/>
+          </a:prstGeom>
+          <a:solidFill>
+            <a:srgbClr val="0369A1"/>
+          </a:solidFill>
+          <a:ln w="12700">
+            <a:solidFill>
+              <a:srgbClr val="0369A1"/>
+            </a:solidFill>
+            <a:prstDash val="solid"/>
+          </a:ln>
+        </p:spPr>
+      </p:sp>
       <p:pic>
         <p:nvPicPr>
-          <p:cNvPr id="13" name="Image 0" descr="preencoded.png">    </p:cNvPr>
+          <p:cNvPr id="14" name="Image 0" descr="preencoded.png">    </p:cNvPr>
           <p:cNvPicPr>
             <a:picLocks noChangeAspect="1"/>
           </p:cNvPicPr>
@@ -30719,6 +33042,83 @@
         </p:nvPicPr>
         <p:blipFill>
           <a:blip r:embed="rId1"/>
+          <a:stretch>
+            <a:fillRect/>
+          </a:stretch>
+        </p:blipFill>
+        <p:spPr>
+          <a:xfrm>
+            <a:off x="8415731" y="128016"/>
+            <a:ext cx="201168" cy="201168"/>
+          </a:xfrm>
+          <a:prstGeom prst="rect">
+            <a:avLst/>
+          </a:prstGeom>
+        </p:spPr>
+      </p:pic>
+      <p:sp>
+        <p:nvSpPr>
+          <p:cNvPr id="15" name="Text 11"/>
+          <p:cNvSpPr txBox="1"/>
+          <p:nvPr/>
+        </p:nvSpPr>
+        <p:spPr>
+          <a:xfrm>
+            <a:off x="8671763" y="91440"/>
+            <a:ext cx="2934716" cy="274320"/>
+          </a:xfrm>
+          <a:prstGeom prst="rect">
+            <a:avLst/>
+          </a:prstGeom>
+          <a:noFill/>
+          <a:ln/>
+        </p:spPr>
+        <p:txBody>
+          <a:bodyPr wrap="square" lIns="0" tIns="0" rIns="0" bIns="0" rtlCol="0" anchor="ctr"/>
+          <a:lstStyle/>
+          <a:p>
+            <a:pPr indent="0" marL="0">
+              <a:buNone/>
+            </a:pPr>
+            <a:r>
+              <a:rPr lang="en-US" sz="1100" b="1" dirty="0">
+                <a:solidFill>
+                  <a:srgbClr val="075985"/>
+                </a:solidFill>
+                <a:latin typeface="Calibri" pitchFamily="34" charset="0"/>
+                <a:ea typeface="Calibri" pitchFamily="34" charset="-122"/>
+                <a:cs typeface="Calibri" pitchFamily="34" charset="-120"/>
+              </a:rPr>
+              <a:t>UNDERSTAND NOW</a:t>
+            </a:r>
+            <a:pPr indent="0" marL="0">
+              <a:buNone/>
+            </a:pPr>
+            <a:r>
+              <a:rPr lang="en-US" sz="1100" dirty="0">
+                <a:solidFill>
+                  <a:srgbClr val="075985"/>
+                </a:solidFill>
+                <a:latin typeface="Calibri" pitchFamily="34" charset="0"/>
+                <a:ea typeface="Calibri" pitchFamily="34" charset="-122"/>
+                <a:cs typeface="Calibri" pitchFamily="34" charset="-120"/>
+              </a:rPr>
+              <a:t> · decoders and encoders</a:t>
+            </a:r>
+            <a:endParaRPr lang="en-US" sz="1100" dirty="0"/>
+          </a:p>
+        </p:txBody>
+      </p:sp>
+      <p:pic>
+        <p:nvPicPr>
+          <p:cNvPr id="17" name="Image 1" descr="preencoded.png">    </p:cNvPr>
+          <p:cNvPicPr>
+            <a:picLocks noChangeAspect="1"/>
+          </p:cNvPicPr>
+          <p:nvPr/>
+        </p:nvPicPr>
+        <p:blipFill>
+          <a:blip r:embed="rId2"/>
           <a:stretch>
             <a:fillRect/>
           </a:stretch>

--- a/en/slides/11-Computer_Architecture-Combinational_Machines.pptx
+++ b/en/slides/11-Computer_Architecture-Combinational_Machines.pptx
@@ -126,26 +126,26 @@
   <p:extLst>
     <p:ext uri="{521415D9-36F7-43E2-AB2F-B90AF26B5E84}">
       <p14:sectionLst xmlns:p14="http://schemas.microsoft.com/office/powerpoint/2010/main">
-        <p14:section name="Opening" id="{eec624d0-4727-02b3-e145-dc5dcd61dfa0}">
+        <p14:section name="Opening" id="{aa211f14-670f-b6fe-7c97-536edf6ae613}">
           <p14:sldIdLst>
             <p14:sldId id="256"/>
             <p14:sldId id="257"/>
           </p14:sldIdLst>
         </p14:section>
-        <p14:section name="Combinational machines" id="{2d369b06-f56e-3b7f-eba9-fc97aa277a37}">
+        <p14:section name="Combinational machines" id="{adf1c307-dff7-c038-4da2-aac5bf993623}">
           <p14:sldIdLst>
             <p14:sldId id="258"/>
             <p14:sldId id="259"/>
           </p14:sldIdLst>
         </p14:section>
-        <p14:section name="Codes" id="{9dffc9a1-01b7-dfc7-502c-d971cdb3c5f9}">
+        <p14:section name="Codes" id="{f7b87627-a0f0-f9e5-59ed-72fc38e37060}">
           <p14:sldIdLst>
             <p14:sldId id="260"/>
             <p14:sldId id="261"/>
             <p14:sldId id="262"/>
           </p14:sldIdLst>
         </p14:section>
-        <p14:section name="Decoders and encoders" id="{f922f783-5662-fdb7-c0de-1ed51751b228}">
+        <p14:section name="Decoders and encoders" id="{87c3644d-bf55-0d23-45ed-f395c2c63684}">
           <p14:sldIdLst>
             <p14:sldId id="263"/>
             <p14:sldId id="264"/>
@@ -153,19 +153,19 @@
             <p14:sldId id="266"/>
           </p14:sldIdLst>
         </p14:section>
-        <p14:section name="Multiplexers and demultiplexers" id="{1c75144b-a95d-44ac-67b7-81a144a7115e}">
+        <p14:section name="Multiplexers and demultiplexers" id="{ad5f3edf-e4e3-5798-b4cb-d8649eed836b}">
           <p14:sldIdLst>
             <p14:sldId id="267"/>
             <p14:sldId id="268"/>
           </p14:sldIdLst>
         </p14:section>
-        <p14:section name="Comparing and checking" id="{10f04a49-f05a-2996-6a81-0ea53b798af3}">
+        <p14:section name="Comparing and checking" id="{b3b2114b-27e5-d716-65be-53271f2b3290}">
           <p14:sldIdLst>
             <p14:sldId id="269"/>
             <p14:sldId id="270"/>
           </p14:sldIdLst>
         </p14:section>
-        <p14:section name="The arithmetic logic unit" id="{e23a7708-73d7-ba06-e2c4-431856bc9173}">
+        <p14:section name="The arithmetic logic unit" id="{121404b4-5f91-efd6-5e90-9c61b733dc16}">
           <p14:sldIdLst>
             <p14:sldId id="271"/>
             <p14:sldId id="272"/>

--- a/en/slides/11-Computer_Architecture-Combinational_Machines.pptx
+++ b/en/slides/11-Computer_Architecture-Combinational_Machines.pptx
@@ -126,26 +126,26 @@
   <p:extLst>
     <p:ext uri="{521415D9-36F7-43E2-AB2F-B90AF26B5E84}">
       <p14:sectionLst xmlns:p14="http://schemas.microsoft.com/office/powerpoint/2010/main">
-        <p14:section name="Opening" id="{aa211f14-670f-b6fe-7c97-536edf6ae613}">
+        <p14:section name="Opening" id="{f2fa7677-b712-701f-97be-628d955ebee7}">
           <p14:sldIdLst>
             <p14:sldId id="256"/>
             <p14:sldId id="257"/>
           </p14:sldIdLst>
         </p14:section>
-        <p14:section name="Combinational machines" id="{adf1c307-dff7-c038-4da2-aac5bf993623}">
+        <p14:section name="Combinational machines" id="{5af73488-85b7-9322-f692-26f7aca620f6}">
           <p14:sldIdLst>
             <p14:sldId id="258"/>
             <p14:sldId id="259"/>
           </p14:sldIdLst>
         </p14:section>
-        <p14:section name="Codes" id="{f7b87627-a0f0-f9e5-59ed-72fc38e37060}">
+        <p14:section name="Codes" id="{edf9a728-1535-6c51-f0e0-22d9e39b22bb}">
           <p14:sldIdLst>
             <p14:sldId id="260"/>
             <p14:sldId id="261"/>
             <p14:sldId id="262"/>
           </p14:sldIdLst>
         </p14:section>
-        <p14:section name="Decoders and encoders" id="{87c3644d-bf55-0d23-45ed-f395c2c63684}">
+        <p14:section name="Decoders and encoders" id="{f49f9ef0-ea06-4688-08b0-17507cecf2aa}">
           <p14:sldIdLst>
             <p14:sldId id="263"/>
             <p14:sldId id="264"/>
@@ -153,19 +153,19 @@
             <p14:sldId id="266"/>
           </p14:sldIdLst>
         </p14:section>
-        <p14:section name="Multiplexers and demultiplexers" id="{ad5f3edf-e4e3-5798-b4cb-d8649eed836b}">
+        <p14:section name="Multiplexers and demultiplexers" id="{d7c9ab54-9530-25bb-5925-1c8d2ba856ed}">
           <p14:sldIdLst>
             <p14:sldId id="267"/>
             <p14:sldId id="268"/>
           </p14:sldIdLst>
         </p14:section>
-        <p14:section name="Comparing and checking" id="{b3b2114b-27e5-d716-65be-53271f2b3290}">
+        <p14:section name="Comparing and checking" id="{0880bc2a-059b-f943-8a60-6392613e04cf}">
           <p14:sldIdLst>
             <p14:sldId id="269"/>
             <p14:sldId id="270"/>
           </p14:sldIdLst>
         </p14:section>
-        <p14:section name="The arithmetic logic unit" id="{121404b4-5f91-efd6-5e90-9c61b733dc16}">
+        <p14:section name="The arithmetic logic unit" id="{919692f1-6264-a15f-1e13-430fbbc5dd0d}">
           <p14:sldIdLst>
             <p14:sldId id="271"/>
             <p14:sldId id="272"/>
@@ -578,7 +578,7 @@
           <a:p>
             <a:r>
               <a:rPr lang="en-US" dirty="0"/>
-              <a:t>The previous lectures gave you gates and a method to combine them. This one is a catalogue of the machines that designers actually use: decoders, encoders, multiplexers, comparators, parity networks, and finally the arithmetic logic unit. For each you learn what it does, how it is built, and where it sits inside a RISC-V processor. The young Turing of the quotation wants his carrots and peas kept apart: this lecture is about keeping things separate, and choosing among them.
+              <a:t>The previous lectures supplied gates and a method for combining them. This one is a catalogue of the standard combinational machines from which designers actually build systems: decoders, encoders, multiplexers, comparators, parity networks, and finally the arithmetic logic unit. For each, the lecture establishes what it computes, how it is constructed, and where it is located inside a RISC-V processor. The young Turing of the epigraph insists that his carrots and peas be kept apart; this lecture is likewise about keeping signals distinct and selecting among them.
 Learning status: UNDERSTAND NOW, by the end of this lecture you explain it, trace it and apply it on your own; USE NOW, you follow and use the recipe today; how it works inside is explained later, or is not part of the course; UNDERSTAND LATER, recognise the name and what it is for; a later lecture explains it. A slide without a badge is context: a story, an example, a question, an exercise.
 Learning status of this lecture. UNDERSTAND NOW: multiplexers; combinational machines; codes; decoders and encoders; comparators and parity; the ALU. USE NOW: the complete program, the PRG32 tools (used, not studied, in this course). UNDERSTAND LATER: finite-state machines (Lecture 13). A slide without a badge is context: a story, an example, a question, an exercise.
 For the lecturer: The quotation is translated back from the Italian version used in the original deck. Spiral: a table lookup in assembly is a multiplexer; the lecture then builds the standard combinational blocks and shows where each one sits inside a RISC-V processor (the old course used the Motorola 68000 as reference).</a:t>
@@ -669,7 +669,7 @@
           <a:p>
             <a:r>
               <a:rPr lang="en-US" dirty="0"/>
-              <a:t>The encoder is the inverse machine: it receives N lines, of which one is active, and produces its number as a code word of m bits. Each output bit is the OR of the input lines whose number has a 1 in that position. If more than one line can be active at the same time a priority encoder is needed, which outputs the number of the most important active line. You will meet it again with interrupts, when several devices ask for attention at once.
+              <a:t>The encoder is the inverse machine: it receives N lines, of which one is active, and produces the index of the active line as an m-bit code word. Each output bit is the OR of the input lines whose index has a 1 in that position. If several lines may be active simultaneously, a priority encoder is required, which outputs the index of the most important active line. The problem it solves, choosing among simultaneous requests, reappears in Lecture 19, where interrupts are ordered by priority.
 UNDERSTAND NOW: decoders and encoders.
 For the lecturer: Codificatore. For N = 4: C0 = U1 + U3, C1 = U2 + U3. Priority encoders appear again with interrupts: several devices ask for attention, one number reaches the processor.</a:t>
             </a:r>
@@ -759,7 +759,7 @@
           <a:p>
             <a:r>
               <a:rPr lang="en-US" dirty="0"/>
-              <a:t>A transcoder converts a word of one code into the corresponding word of another code. The example is the display with seven segments: the input is a BCD digit, the outputs are the seven lines that light the segments, named from a to g. The table gives, for each digit, which segments are lit: the digit 2 lights a, b, g, e and d. There are seven outputs, so seven functions of four variables to synthesise, each with six don't-cares.
+              <a:t>A transcoder converts a word of one code into the corresponding word of another. The example is the seven-segment display: the input is a BCD digit, and the outputs are the seven lines, a to g, that light the segments. The table gives, for each digit, the segments that are lit: the digit 2 lights a, b, g, e and d. There are seven outputs, hence seven functions of four variables to synthesise, each with six don't-care conditions that the Karnaugh maps of Lecture 09 can exploit.
 UNDERSTAND NOW: decoders and encoders.
 For the lecturer: Transcodificatore BCD - display a 7 segmenti. Each segment is an LED switched by a digital signal. The six unused BCD words are don't-cares for all seven functions.</a:t>
             </a:r>
@@ -849,7 +849,7 @@
           <a:p>
             <a:r>
               <a:rPr lang="en-US" dirty="0"/>
-              <a:t>A multiplexer has 2 to the n data inputs, n selection lines and one output: it transfers to the output the input chosen by the selection lines. The formula shows how: each data input is multiplied by one minterm of the selection lines, and the products are added. With two inputs, Y = S'I0 + S I1: when S is 0 the first term passes I0, when S is 1 the second passes I1. The drawing is exactly this formula in gates. It is the machine of the warm-up.
+              <a:t>A multiplexer has 2^n data inputs, n selection lines and one output: it routes to the output the input designated by the selection lines. The formula shows how: each data input is multiplied by one minterm of the selection lines, and the products are summed. With two inputs, Y = S'I0 + S I1: when S is 0 the first term passes I0, when S is 1 the second passes I1. The drawing realises this formula directly in gates. It is the machine that the warm-up implemented in software.
 UNDERSTAND NOW: multiplexers.
 For the lecturer: Multiplexer indirizzabile: a MUXL (one enable line per input) plus a decoder. A multiplexer also implements any function of its selection variables: put the truth table on the data inputs.</a:t>
             </a:r>
@@ -939,7 +939,7 @@
           <a:p>
             <a:r>
               <a:rPr lang="en-US" dirty="0"/>
-              <a:t>The demultiplexer is the inverse: one data input, n selection lines and 2 to the n outputs. The input is routed to the output chosen by the selection lines, and the other outputs stay at 0. With the data input fixed at 1 it is exactly a decoder. A multiplexer at one end of a wire and a demultiplexer at the other let many signals share that wire, one at a time: the idea behind every shared line, including the buses of Lecture 14.
+              <a:t>The demultiplexer is the inverse: one data input, n selection lines and 2^n outputs. The input is routed to the output designated by the selection lines, while the other outputs remain at 0. With the data input held at 1, a demultiplexer is precisely a decoder. A multiplexer at one end of a wire and a demultiplexer at the other allow many signals to share that wire, one at a time: the principle underlying every shared line, including the buses of Lecture 14.
 UNDERSTAND NOW: multiplexers.
 For the lecturer: Demultiplexer indirizzabile: Fi = D . Ui, where Ui are the outputs of the decoder.</a:t>
             </a:r>
@@ -1029,7 +1029,7 @@
           <a:p>
             <a:r>
               <a:rPr lang="en-US" dirty="0"/>
-              <a:t>A comparator receives two words and produces one bit, 1 when they are equal. Two bits are equal when their XNOR is 1; two words are equal when all their pairs of bits are equal, so the comparator is an AND of XNORs. The drawing shows it for words of two bits. In the processor it decides the branches beq and bne: the two registers are compared, and the branch is taken or not according to the result.
+              <a:t>A comparator receives two words and produces a single bit, 1 when they are equal. Two bits are equal when their XNOR is 1; two words are equal when all corresponding pairs of bits are equal, so the comparator is an AND of XNORs. The drawing shows the two-bit case. In the processor the comparator decides the branches beq and bne: the two registers are compared, and the branch is taken or not according to the result.
 UNDERSTAND NOW: comparators and parity.
 For the lecturer: Comparatore. Many datapaths reuse the ALU instead: subtract and test whether the result is zero. Ordering comparisons (blt, slt) need the subtraction and the sign rules of Lecture 05.</a:t>
             </a:r>
@@ -1119,7 +1119,7 @@
           <a:p>
             <a:r>
               <a:rPr lang="en-US" dirty="0"/>
-              <a:t>The simplest redundant code adds one parity bit to each word, chosen so that the total number of 1s is, for example, even. The circuit that computes it is a parity network, a chain of XORs: the XOR of all the bits of a word is 1 when the number of 1s is odd, because XOR is addition modulo 2. The network is used twice: by the sender, to compute the bit to add, and by the receiver, to verify the parity of what arrived.
+              <a:t>The simplest redundant code appends a parity bit to each word, chosen so that the total number of 1s is, for instance, even. The circuit that computes it is a parity network, a tree of XOR gates: the XOR of all the bits of a word is 1 when the number of 1s is odd, because XOR is addition modulo 2. The same network is used twice: by the sender, to compute the bit to append, and by the receiver, to verify the parity of what has arrived.
 UNDERSTAND NOW: comparators and parity.
 For the lecturer: Rete di parità. XOR is addition modulo 2, which is why a chain of XORs counts the 1s modulo 2.</a:t>
             </a:r>
@@ -1209,7 +1209,7 @@
           <a:p>
             <a:r>
               <a:rPr lang="en-US" dirty="0"/>
-              <a:t>The ALU receives two words, A and B. Inside it several units work at the same time on the same operands: an adder that also subtracts, a row of AND gates, a row of OR gates, a row of XOR gates, a shifter. All of them produce a result. A multiplexer lets one of the results through, and its selection lines come from a decoder that reads the instruction. There is no memory anywhere: the ALU is one large combinational machine, and its slowest path, the carry chain of the adder, limits the clock of the processor.
+              <a:t>The ALU receives two words, A and B. Within it several units operate simultaneously on the same operands: an adder that also subtracts, a row of AND gates, a row of OR gates, a row of XOR gates, a shifter. Each produces a result, and a multiplexer passes one of them to the output, its selection lines driven by a decoder that reads the instruction. There is no memory anywhere: the ALU is one large combinational machine, and its slowest path, the carry chain of the adder, bounds the clock frequency of the processor. The catalogue of the lecture thus converges on the heart of the datapath.
 UNDERSTAND NOW: the ALU.
 For the lecturer: Unità aritmetico-logica. The adder is the ripple-carry adder of Lecture 09, with the complement-and-carry trick of Lecture 05 for subtraction. Comparisons (slt) reuse the subtractor.</a:t>
             </a:r>
@@ -1299,8 +1299,8 @@
           <a:p>
             <a:r>
               <a:rPr lang="en-US" dirty="0"/>
-              <a:t>Use the formula of the fixed-length code: the smallest m such that 2 to the m is at least 26. Four bits give sixteen words, which are not enough. And note that the result leaves some words unused.
-A decoder with m inputs has 2 to the m outputs, and its output is a decoded representation: exactly one line active at any time.
+              <a:t>For the first question the fixed-length formula applies: the smallest m such that 2^m is at least 26. Four bits give sixteen words, which do not suffice; the result also leaves some words unused, making the code incomplete.
+For the second, a decoder with m inputs has 2^m outputs, and its output is in decoded representation: exactly one line is active at any time.
 For the lecturer: 1. Answer: B. ceil(log2 26) = 5, since 2^4 = 16 &lt; 26 &lt;= 32 = 2^5. Six words remain unassigned: the code is incomplete.
 2. Answer: C. 2^3 = 8 outputs, and exactly one is asserted: the decoded (one-hot) representation of the input word.</a:t>
             </a:r>
@@ -1390,8 +1390,8 @@
           <a:p>
             <a:r>
               <a:rPr lang="en-US" dirty="0"/>
-              <a:t>The relation is the inverse of the previous one: n selection lines choose among 2 to the n inputs. Eight is 2 to the third power.
-Count the 1s. A parity check only knows whether their number is even or odd. Altering one bit changes that; altering two bits changes it twice, and brings it back to where it was.
+              <a:t>For the first question the relation is the inverse of the preceding one: n selection lines choose among 2^n inputs, and eight is 2^3.
+For the second, one counts the 1s. A parity check knows only whether their number is even or odd. Altering one bit changes the parity; altering two bits changes it twice, restoring it. The check therefore detects every single-bit error and no double-bit error.
 For the lecturer: 1. Answer: B. n selection lines choose among 2^n inputs: 3 lines for 8 inputs.
 2. Answer: C. Two alterations leave the parity unchanged. A single parity bit detects only an odd number of errors.</a:t>
             </a:r>
@@ -1481,7 +1481,7 @@
           <a:p>
             <a:r>
               <a:rPr lang="en-US" dirty="0"/>
-              <a:t>Twelve terms. Enable is the input that switches a block on or off. Code word is each string of a code. Multiplexer and demultiplexer keep their names in Italian. A transcoder converts between two codes. The parity bit is the redundant bit added for the check.</a:t>
+              <a:t>Twelve terms. Enable is the input that activates or deactivates a block. A code word is each string of a code. Multiplexer and demultiplexer retain their names in Italian. A transcoder converts between two codes. The parity bit is the redundant bit appended for the check.</a:t>
             </a:r>
             <a:endParaRPr lang="en-US" dirty="0"/>
           </a:p>
@@ -1569,7 +1569,7 @@
           <a:p>
             <a:r>
               <a:rPr lang="en-US" dirty="0"/>
-              <a:t>Six objectives. Tell a combinational machine from a sequential one. Compute how many bits a code needs and recognise incomplete and redundant codes. Design a decoder and an encoder, and say what a transcoder does. Explain multiplexers and demultiplexers and build them from gates. Build a comparator and a parity network, knowing what a parity check can and cannot detect. And point to each of these machines inside the processor.</a:t>
+              <a:t>Six learning outcomes. Distinguishing a combinational machine from a sequential one. Computing the number of bits a code requires, and recognising incomplete and redundant codes. Designing a decoder and an encoder, and explaining what a transcoder does. Explaining multiplexers and demultiplexers and building them from gates. Building a comparator and a parity network, with a clear understanding of what a parity check can and cannot detect. And locating each of these machines within the processor.</a:t>
             </a:r>
             <a:endParaRPr lang="en-US" dirty="0"/>
           </a:p>
@@ -1657,7 +1657,7 @@
           <a:p>
             <a:r>
               <a:rPr lang="en-US" dirty="0"/>
-              <a:t>Five conclusions. A code writes each element of a set as a string of symbols over an alphabet, its code word. A fixed-length binary code needs the logarithm of N bits, rounded up; a redundant code spends more to detect errors. Encoding, decoding and transcoding are done by combinational machines. Multiplexers select a source, demultiplexers a destination, comparators and parity networks check. And the processor uses all of them. What these machines lack is memory: after Part 2 of Verm1, Lecture 13 adds it.
+              <a:t>Five conclusions. A code writes each element of a set as a string of symbols, its code word. A fixed-length binary code requires the ceiling of log2 N bits, and a redundant code spends additional bits to detect errors. Encoding, decoding and transcoding are performed by combinational machines. Multiplexers select a source, demultiplexers a destination, while comparators and parity networks verify. The processor employs every one of them. What these machines lack is memory: after Part 2 of Verm1, Lecture 13 supplies it.
 Learning status, recap. UNDERSTAND NOW: multiplexers; combinational machines; codes; decoders and encoders; comparators and parity; the ALU. USE NOW: the complete program, the PRG32 tools (used, not studied, in this course). UNDERSTAND LATER: finite-state machines (Lecture 13). A slide without a badge is context: a story, an example, a question, an exercise.
 For the lecturer: Next: Verm1, part 2: steering and food. Then sequential machines: what is missing here is memory.</a:t>
             </a:r>
@@ -1747,7 +1747,7 @@
           <a:p>
             <a:r>
               <a:rPr lang="en-US" dirty="0"/>
-              <a:t>Digital circuits are of two kinds. In a combinational circuit the outputs at a given instant depend only on the inputs at that same instant: there is no memory and no feedback, and a truth table describes the circuit completely. In a sequential circuit the outputs depend also on the past history of the inputs: it needs the notions of time and of state. Adders, decoders and multiplexers are combinational; flip-flops, registers and the processor as a whole are sequential, and are the subject of Lecture 13.
+              <a:t>Digital circuits fall into two classes. In a combinational circuit the outputs at a given instant depend only on the inputs at that same instant: there is neither memory nor feedback, and a truth table describes the circuit completely. In a sequential circuit the outputs depend also on the history of the inputs, so the notions of time and state are required. Adders, decoders and multiplexers are combinational; flip-flops, registers and the processor as a whole are sequential, and they are the subject of Lecture 13.
 UNDERSTAND NOW: combinational machines. UNDERSTAND LATER: finite-state machines (studied in Lecture 13).
 For the lecturer: Reti combinatorie and reti sequenziali. The definition of a sequential circuit implies time and state: both are the subject of the next lecture.</a:t>
             </a:r>
@@ -1837,7 +1837,7 @@
           <a:p>
             <a:r>
               <a:rPr lang="en-US" dirty="0"/>
-              <a:t>A real gate does not answer instantly: its output settles after a propagation delay, as Lecture 10 explained. The delay of a network is that of its slowest path from an input to an output, the critical path. While signals are travelling the outputs may be temporarily wrong. So a combinational machine is correct only after it has settled, and something must say when to look at its outputs. That something is the clock, and it is where sequential machines begin.
+              <a:t>A physical gate does not respond instantaneously: its output settles after a propagation delay, whose origin Lecture 10 explained. The delay of a network is that of its slowest path from an input to an output, the critical path. While signals propagate, the outputs may be transiently incorrect. A combinational machine is therefore correct only once it has settled, and some mechanism must indicate when its outputs may be sampled. That mechanism is the clock, and with it the study of sequential machines begins.
 UNDERSTAND NOW: combinational machines.
 For the lecturer: In a ripple-carry adder (Lecture 09) the critical path crosses all thirty-two full adders. The clock period of a processor must be longer than its longest critical path.</a:t>
             </a:r>
@@ -1927,7 +1927,7 @@
           <a:p>
             <a:r>
               <a:rPr lang="en-US" dirty="0"/>
-              <a:t>A code associates each element of a set of N elements with a string of symbols, the code word. In a fixed-length code all the words have the same length m. With an alphabet of k symbols there are k to the m words, so m must be at least the logarithm of N, rounded up. In binary: fourteen marks need 4 bits, and the 32 registers of RISC-V need exactly 5. When N is not a power of two some words remain unused, and the code is incomplete.
+              <a:t>A code associates each element of a set of N elements with a string of symbols, its code word. In a fixed-length code every word has the same length m. With an alphabet of k symbols there are k^m words, so m must be at least the logarithm to base k of N, rounded up. In binary, fourteen items require 4 bits, and the 32 registers of RISC-V require exactly 5, which is why each register field of an instruction is five bits wide. When N is not a power of two some words remain unused, and the code is incomplete.
 UNDERSTAND NOW: codes.
 For the lecturer: Codice a lunghezza fissa. The five bits of a register number are the fields rd, rs1 and rs2 of a RISC-V instruction (Lecture 02). Fourteen marks leave 16 - 14 = 2 unassigned words.</a:t>
             </a:r>
@@ -2017,7 +2017,7 @@
           <a:p>
             <a:r>
               <a:rPr lang="en-US" dirty="0"/>
-              <a:t>The classic incomplete code: decimal digits on four bits. In BCD 8421 each digit is simply its value in binary; in excess-3 the value is increased by three. Ten digits need four bits, and four bits give sixteen words, so six of them are never used: in BCD, the words from 1010 to 1111. Remember the caption: when you design a circuit that receives BCD digits, those six words are don't-cares and make the circuit simpler.
+              <a:t>The classic incomplete code: decimal digits on four bits. In BCD 8421 each digit is simply its value in binary; in excess-3 the value is increased by three. Ten digits require four bits, and four bits give sixteen words, so six are never used: in BCD, the words from 1010 to 1111. The caption draws the design consequence: in a circuit that receives BCD digits, those six words are don't-care conditions, and exploiting them simplifies the circuit.
 UNDERSTAND NOW: codes.
 For the lecturer: Ten digits need ceil(log2 10) = 4 bits; six of the sixteen words are never used: in BCD 8421 they are 1010 to 1111. Unused words become don't-care conditions when we design a circuit (Lecture 09).</a:t>
             </a:r>
@@ -2107,7 +2107,7 @@
           <a:p>
             <a:r>
               <a:rPr lang="en-US" dirty="0"/>
-              <a:t>A redundant code uses more bits than the minimum, so only some of the possible words are legal. If a word arrives that is not legal, something altered it on the way, and the error is detected. Compare the two codes of the table. In Code 1 every 2-bit word is legal: an altered bit turns one element into another and nobody notices. Code 2 adds a third bit that makes the number of 1s even: any single altered bit produces an illegal word. Redundancy is the price paid for detecting errors.
+              <a:t>A redundant code uses more bits than the minimum, so that only some of the possible words are legal. The arrival of an illegal word reveals that something altered it in transit, and the error is detected. The two codes of the table make the point. In Code 1 every 2-bit word is legal, so an altered bit turns one element into another and the error passes unnoticed. Code 2 adds a third bit that makes the number of 1s even, so any single altered bit produces an illegal word. Redundancy is the price paid for error detection.
 UNDERSTAND NOW: codes.
 For the lecturer: The original slide showed the same idea with a picture and a different choice of illegal words. Code 2 is Code 1 plus an even-parity bit: the parity machines come later in this lecture.</a:t>
             </a:r>
@@ -2197,7 +2197,7 @@
           <a:p>
             <a:r>
               <a:rPr lang="en-US" dirty="0"/>
-              <a:t>In the decoded representation there are as many bits as elements, and exactly one of them is 1: one line per element. It is also called one-hot. It is expensive in wires but immediately usable, because the active line can directly switch something on. The practical rule is in the last line: keep information in a compact code inside a word, and decode it where a choice has to be acted upon.
+              <a:t>In the decoded representation there are as many bits as elements, and exactly one of them is 1: one line per element, a scheme also called one-hot. It is costly in wires but immediately usable, because the active line can directly enable the corresponding action. The design principle is stated in the last line: information is kept in a compact code inside a word, and decoded only at the point where a choice must be acted upon. The button word of Lecture 08 is an example of the decoded form.
 UNDERSTAND NOW: decoders and encoders.
 For the lecturer: Also called one-hot. The seven lamps of lab 06 are a decoded representation of the bit number; the 32 write-enable lines of the RISC-V registers are another.</a:t>
             </a:r>
@@ -2287,7 +2287,7 @@
           <a:p>
             <a:r>
               <a:rPr lang="en-US" dirty="0"/>
-              <a:t>A decoder receives a code word of m bits and asserts the one output, out of 2 to the m, that corresponds to it. The table and the circuit show the 2-to-4 decoder: each output is a minterm of the two inputs, built with one AND gate and, where needed, inverters. So a decoder generates all the minterms of its inputs. An enable input, when it is 0, keeps all the outputs at 0: it will be the key to composing decoders.
+              <a:t>A decoder receives an m-bit code word and asserts the single output, among 2^m, that corresponds to it. The table and the circuit show the 2-to-4 decoder: each output is a minterm of the two inputs, built from one AND gate and inverters where required. A decoder thus generates all the minterms of its inputs, and with an OR gate can therefore implement any function of them. An enable input, when 0, holds every output at 0; it is the key to composing small decoders into larger ones.
 UNDERSTAND NOW: decoders and encoders.
 For the lecturer: Synthesis of the 2-to-4 decoder (1 out of 4). A is the least significant bit. Decodificatore: the block symbol is a box marked 1/N.</a:t>
             </a:r>
@@ -3367,7 +3367,7 @@
                 <a:ea typeface="Calibri" pitchFamily="34" charset="-122"/>
                 <a:cs typeface="Calibri" pitchFamily="34" charset="-120"/>
               </a:rPr>
-              <a:t>11-Computer_Architecture-Combinational_Machines-Code.pptx</a:t>
+              <a:t>11-Computer_Architecture-Combinational_Machines-Lab.pptx</a:t>
             </a:r>
             <a:endParaRPr lang="en-US" sz="1300" dirty="0"/>
           </a:p>

--- a/en/slides/11-Computer_Architecture-Combinational_Machines.pptx
+++ b/en/slides/11-Computer_Architecture-Combinational_Machines.pptx
@@ -126,26 +126,26 @@
   <p:extLst>
     <p:ext uri="{521415D9-36F7-43E2-AB2F-B90AF26B5E84}">
       <p14:sectionLst xmlns:p14="http://schemas.microsoft.com/office/powerpoint/2010/main">
-        <p14:section name="Opening" id="{f2fa7677-b712-701f-97be-628d955ebee7}">
+        <p14:section name="Opening" id="{8b529704-eb8c-0136-709a-5ef4f4ccf142}">
           <p14:sldIdLst>
             <p14:sldId id="256"/>
             <p14:sldId id="257"/>
           </p14:sldIdLst>
         </p14:section>
-        <p14:section name="Combinational machines" id="{5af73488-85b7-9322-f692-26f7aca620f6}">
+        <p14:section name="Combinational machines" id="{7d8b9b4c-d92b-f2cb-d1a1-bd81fa72aee6}">
           <p14:sldIdLst>
             <p14:sldId id="258"/>
             <p14:sldId id="259"/>
           </p14:sldIdLst>
         </p14:section>
-        <p14:section name="Codes" id="{edf9a728-1535-6c51-f0e0-22d9e39b22bb}">
+        <p14:section name="Codes" id="{cad4fdb5-60ec-51e9-f56b-937239b5f281}">
           <p14:sldIdLst>
             <p14:sldId id="260"/>
             <p14:sldId id="261"/>
             <p14:sldId id="262"/>
           </p14:sldIdLst>
         </p14:section>
-        <p14:section name="Decoders and encoders" id="{f49f9ef0-ea06-4688-08b0-17507cecf2aa}">
+        <p14:section name="Decoders and encoders" id="{bea86455-fed6-f186-8cfe-85a420adc9ec}">
           <p14:sldIdLst>
             <p14:sldId id="263"/>
             <p14:sldId id="264"/>
@@ -153,19 +153,19 @@
             <p14:sldId id="266"/>
           </p14:sldIdLst>
         </p14:section>
-        <p14:section name="Multiplexers and demultiplexers" id="{d7c9ab54-9530-25bb-5925-1c8d2ba856ed}">
+        <p14:section name="Multiplexers and demultiplexers" id="{554d7028-f13b-ecdc-aa31-e2ab3b70783b}">
           <p14:sldIdLst>
             <p14:sldId id="267"/>
             <p14:sldId id="268"/>
           </p14:sldIdLst>
         </p14:section>
-        <p14:section name="Comparing and checking" id="{0880bc2a-059b-f943-8a60-6392613e04cf}">
+        <p14:section name="Comparing and checking" id="{29616e56-fe60-15e2-93c0-ee5cffc74461}">
           <p14:sldIdLst>
             <p14:sldId id="269"/>
             <p14:sldId id="270"/>
           </p14:sldIdLst>
         </p14:section>
-        <p14:section name="The arithmetic logic unit" id="{919692f1-6264-a15f-1e13-430fbbc5dd0d}">
+        <p14:section name="The arithmetic logic unit" id="{9ded650f-ff86-9447-4742-5061dd3c06e5}">
           <p14:sldIdLst>
             <p14:sldId id="271"/>
             <p14:sldId id="272"/>

--- a/en/slides/11-Computer_Architecture-Combinational_Machines.pptx
+++ b/en/slides/11-Computer_Architecture-Combinational_Machines.pptx
@@ -126,26 +126,26 @@
   <p:extLst>
     <p:ext uri="{521415D9-36F7-43E2-AB2F-B90AF26B5E84}">
       <p14:sectionLst xmlns:p14="http://schemas.microsoft.com/office/powerpoint/2010/main">
-        <p14:section name="Opening" id="{8b529704-eb8c-0136-709a-5ef4f4ccf142}">
+        <p14:section name="Opening" id="{9356f998-2293-06ca-2152-684e67389264}">
           <p14:sldIdLst>
             <p14:sldId id="256"/>
             <p14:sldId id="257"/>
           </p14:sldIdLst>
         </p14:section>
-        <p14:section name="Combinational machines" id="{7d8b9b4c-d92b-f2cb-d1a1-bd81fa72aee6}">
+        <p14:section name="Combinational machines" id="{b23346b6-9fb9-fef3-74d1-02ee31e265f5}">
           <p14:sldIdLst>
             <p14:sldId id="258"/>
             <p14:sldId id="259"/>
           </p14:sldIdLst>
         </p14:section>
-        <p14:section name="Codes" id="{cad4fdb5-60ec-51e9-f56b-937239b5f281}">
+        <p14:section name="Codes" id="{9f64f741-9b86-3471-9f3e-38fcebbe5ed1}">
           <p14:sldIdLst>
             <p14:sldId id="260"/>
             <p14:sldId id="261"/>
             <p14:sldId id="262"/>
           </p14:sldIdLst>
         </p14:section>
-        <p14:section name="Decoders and encoders" id="{bea86455-fed6-f186-8cfe-85a420adc9ec}">
+        <p14:section name="Decoders and encoders" id="{40391ea4-c2ab-d9b6-2335-60521d54a40f}">
           <p14:sldIdLst>
             <p14:sldId id="263"/>
             <p14:sldId id="264"/>
@@ -153,19 +153,19 @@
             <p14:sldId id="266"/>
           </p14:sldIdLst>
         </p14:section>
-        <p14:section name="Multiplexers and demultiplexers" id="{554d7028-f13b-ecdc-aa31-e2ab3b70783b}">
+        <p14:section name="Multiplexers and demultiplexers" id="{822346b5-cdb7-b3c7-7cfc-6cc269cc459e}">
           <p14:sldIdLst>
             <p14:sldId id="267"/>
             <p14:sldId id="268"/>
           </p14:sldIdLst>
         </p14:section>
-        <p14:section name="Comparing and checking" id="{29616e56-fe60-15e2-93c0-ee5cffc74461}">
+        <p14:section name="Comparing and checking" id="{c7c29a06-e57c-5429-7faa-ab92387aac54}">
           <p14:sldIdLst>
             <p14:sldId id="269"/>
             <p14:sldId id="270"/>
           </p14:sldIdLst>
         </p14:section>
-        <p14:section name="The arithmetic logic unit" id="{9ded650f-ff86-9447-4742-5061dd3c06e5}">
+        <p14:section name="The arithmetic logic unit" id="{68b78a03-4b7d-ad43-6c42-6a2a70b6f4c8}">
           <p14:sldIdLst>
             <p14:sldId id="271"/>
             <p14:sldId id="272"/>
@@ -581,6 +581,8 @@
               <a:t>The previous lectures supplied gates and a method for combining them. This one is a catalogue of the standard combinational machines from which designers actually build systems: decoders, encoders, multiplexers, comparators, parity networks, and finally the arithmetic logic unit. For each, the lecture establishes what it computes, how it is constructed, and where it is located inside a RISC-V processor. The young Turing of the epigraph insists that his carrots and peas be kept apart; this lecture is likewise about keeping signals distinct and selecting among them.
 Learning status: UNDERSTAND NOW, by the end of this lecture you explain it, trace it and apply it on your own; USE NOW, you follow and use the recipe today; how it works inside is explained later, or is not part of the course; UNDERSTAND LATER, recognise the name and what it is for; a later lecture explains it. A slide without a badge is context: a story, an example, a question, an exercise.
 Learning status of this lecture. UNDERSTAND NOW: multiplexers; combinational machines; codes; decoders and encoders; comparators and parity; the ALU. USE NOW: the complete program, the PRG32 tools (used, not studied, in this course). UNDERSTAND LATER: finite-state machines (Lecture 13). A slide without a badge is context: a story, an example, a question, an exercise.
+Roadmap. Today's outcomes: (1) tell a combinational machine from a sequential one; (2) use decoders, multiplexers, comparators and parity; (3) explain the ALU as parallel units and a multiplexer. Builds on: only what Lecture 01 set up. Next: Lecture 12, Verm1, Part 2: Steering, Food and a Score.
+Bridge. In Lecture 02 an instruction was a 32-bit number, and the processor somehow knew what to do with it. Today a decoder reads a field of that number, funct3, and drives the multiplexer that picks the ALU's result. Lecture 19 describes all the fields and the fetch, decode, execute cycle. Recall: Which part of the word of an instruction tells the ALU to add rather than to compute an AND?
 For the lecturer: The quotation is translated back from the Italian version used in the original deck. Spiral: a table lookup in assembly is a multiplexer; the lecture then builds the standard combinational blocks and shows where each one sits inside a RISC-V processor (the old course used the Motorola 68000 as reference).</a:t>
             </a:r>
             <a:endParaRPr lang="en-US" dirty="0"/>
@@ -1658,7 +1660,7 @@
             <a:r>
               <a:rPr lang="en-US" dirty="0"/>
               <a:t>Five conclusions. A code writes each element of a set as a string of symbols, its code word. A fixed-length binary code requires the ceiling of log2 N bits, and a redundant code spends additional bits to detect errors. Encoding, decoding and transcoding are performed by combinational machines. Multiplexers select a source, demultiplexers a destination, while comparators and parity networks verify. The processor employs every one of them. What these machines lack is memory: after Part 2 of Verm1, Lecture 13 supplies it.
-Learning status, recap. UNDERSTAND NOW: multiplexers; combinational machines; codes; decoders and encoders; comparators and parity; the ALU. USE NOW: the complete program, the PRG32 tools (used, not studied, in this course). UNDERSTAND LATER: finite-state machines (Lecture 13). A slide without a badge is context: a story, an example, a question, an exercise.
+Learning status, recap. UNDERSTAND NOW: multiplexers; combinational machines; codes; decoders and encoders; comparators and parity; the ALU. USE NOW: the complete program, the PRG32 tools (used, not studied, in this course). UNDERSTAND LATER: finite-state machines (Lecture 13). A slide without a badge is context: a story, an example, a question, an exercise. Closing thread: The ALU that executed every add so far is one large combinational machine: many results computed at once, one chosen. Next: these circuits at work in the second part of Verm1. Exit ticket (two to four minutes, alone, on paper): 1. Combinational or sequential: an adder; a counter of button presses; a multiplexer; the processor as a whole? State the rule you used. 2. The ALU computes the sum, the AND, the OR, the XOR and a shift of the same two words at the same time. How does only the result of add t2, t0, t1 reach t2, and who chooses it?
 For the lecturer: Next: Verm1, part 2: steering and food. Then sequential machines: what is missing here is memory.</a:t>
             </a:r>
             <a:endParaRPr lang="en-US" dirty="0"/>
